--- a/110_linux_script_exercise/linux_01_shell_script_guide.pptx
+++ b/110_linux_script_exercise/linux_01_shell_script_guide.pptx
@@ -5,28 +5,28 @@
     <p:sldMasterId id="2147483648" r:id="rId1"/>
   </p:sldMasterIdLst>
   <p:sldIdLst>
-    <p:sldId id="256" r:id="rId7"/>
-    <p:sldId id="257" r:id="rId8"/>
-    <p:sldId id="258" r:id="rId9"/>
-    <p:sldId id="259" r:id="rId10"/>
-    <p:sldId id="260" r:id="rId11"/>
-    <p:sldId id="261" r:id="rId12"/>
-    <p:sldId id="262" r:id="rId13"/>
-    <p:sldId id="263" r:id="rId14"/>
-    <p:sldId id="264" r:id="rId15"/>
-    <p:sldId id="265" r:id="rId16"/>
-    <p:sldId id="266" r:id="rId17"/>
-    <p:sldId id="267" r:id="rId18"/>
-    <p:sldId id="268" r:id="rId19"/>
-    <p:sldId id="269" r:id="rId20"/>
-    <p:sldId id="270" r:id="rId21"/>
-    <p:sldId id="271" r:id="rId22"/>
-    <p:sldId id="272" r:id="rId23"/>
-    <p:sldId id="273" r:id="rId24"/>
-    <p:sldId id="274" r:id="rId25"/>
-    <p:sldId id="275" r:id="rId26"/>
+    <p:sldId id="256" r:id="rId2"/>
+    <p:sldId id="257" r:id="rId3"/>
+    <p:sldId id="258" r:id="rId4"/>
+    <p:sldId id="259" r:id="rId5"/>
+    <p:sldId id="260" r:id="rId6"/>
+    <p:sldId id="261" r:id="rId7"/>
+    <p:sldId id="262" r:id="rId8"/>
+    <p:sldId id="263" r:id="rId9"/>
+    <p:sldId id="264" r:id="rId10"/>
+    <p:sldId id="265" r:id="rId11"/>
+    <p:sldId id="266" r:id="rId12"/>
+    <p:sldId id="267" r:id="rId13"/>
+    <p:sldId id="268" r:id="rId14"/>
+    <p:sldId id="269" r:id="rId15"/>
+    <p:sldId id="270" r:id="rId16"/>
+    <p:sldId id="271" r:id="rId17"/>
+    <p:sldId id="272" r:id="rId18"/>
+    <p:sldId id="273" r:id="rId19"/>
+    <p:sldId id="274" r:id="rId20"/>
+    <p:sldId id="275" r:id="rId21"/>
   </p:sldIdLst>
-  <p:sldSz cx="12191695" cy="6858000" type="screen4x3"/>
+  <p:sldSz cx="12192000" cy="6858000"/>
   <p:notesSz cx="6858000" cy="9144000"/>
   <p:defaultTextStyle>
     <a:defPPr>
@@ -123,6 +123,22 @@
       </a:defRPr>
     </a:lvl9pPr>
   </p:defaultTextStyle>
+  <p:extLst>
+    <p:ext uri="{EFAFB233-063F-42B5-8137-9DF3F51BA10A}">
+      <p15:sldGuideLst xmlns:p15="http://schemas.microsoft.com/office/powerpoint/2012/main">
+        <p15:guide id="1" orient="horz" pos="2160" userDrawn="1">
+          <p15:clr>
+            <a:srgbClr val="A4A3A4"/>
+          </p15:clr>
+        </p15:guide>
+        <p15:guide id="2" pos="2880" userDrawn="1">
+          <p15:clr>
+            <a:srgbClr val="A4A3A4"/>
+          </p15:clr>
+        </p15:guide>
+      </p15:sldGuideLst>
+    </p:ext>
+  </p:extLst>
 </p:presentation>
 </file>
 
@@ -155,7 +171,7 @@
         </p:nvSpPr>
         <p:spPr>
           <a:xfrm>
-            <a:off x="685800" y="2130425"/>
+            <a:off x="2133600" y="1219200"/>
             <a:ext cx="7772400" cy="1470025"/>
           </a:xfrm>
         </p:spPr>
@@ -164,10 +180,9 @@
           <a:lstStyle/>
           <a:p>
             <a:r>
-              <a:rPr lang="en-US" smtClean="0"/>
+              <a:rPr lang="en-US"/>
               <a:t>Click to edit Master title style</a:t>
             </a:r>
-            <a:endParaRPr lang="en-US"/>
           </a:p>
         </p:txBody>
       </p:sp>
@@ -183,7 +198,7 @@
         </p:nvSpPr>
         <p:spPr>
           <a:xfrm>
-            <a:off x="1371600" y="3886200"/>
+            <a:off x="2895600" y="3292476"/>
             <a:ext cx="6400800" cy="1752600"/>
           </a:xfrm>
         </p:spPr>
@@ -200,7 +215,7 @@
                 </a:solidFill>
               </a:defRPr>
             </a:lvl1pPr>
-            <a:lvl2pPr marL="457200" indent="0" algn="ctr">
+            <a:lvl2pPr marL="457189" indent="0" algn="ctr">
               <a:buNone/>
               <a:defRPr>
                 <a:solidFill>
@@ -210,7 +225,7 @@
                 </a:solidFill>
               </a:defRPr>
             </a:lvl2pPr>
-            <a:lvl3pPr marL="914400" indent="0" algn="ctr">
+            <a:lvl3pPr marL="914377" indent="0" algn="ctr">
               <a:buNone/>
               <a:defRPr>
                 <a:solidFill>
@@ -220,7 +235,7 @@
                 </a:solidFill>
               </a:defRPr>
             </a:lvl3pPr>
-            <a:lvl4pPr marL="1371600" indent="0" algn="ctr">
+            <a:lvl4pPr marL="1371566" indent="0" algn="ctr">
               <a:buNone/>
               <a:defRPr>
                 <a:solidFill>
@@ -230,7 +245,7 @@
                 </a:solidFill>
               </a:defRPr>
             </a:lvl4pPr>
-            <a:lvl5pPr marL="1828800" indent="0" algn="ctr">
+            <a:lvl5pPr marL="1828754" indent="0" algn="ctr">
               <a:buNone/>
               <a:defRPr>
                 <a:solidFill>
@@ -240,7 +255,7 @@
                 </a:solidFill>
               </a:defRPr>
             </a:lvl5pPr>
-            <a:lvl6pPr marL="2286000" indent="0" algn="ctr">
+            <a:lvl6pPr marL="2285943" indent="0" algn="ctr">
               <a:buNone/>
               <a:defRPr>
                 <a:solidFill>
@@ -250,7 +265,7 @@
                 </a:solidFill>
               </a:defRPr>
             </a:lvl6pPr>
-            <a:lvl7pPr marL="2743200" indent="0" algn="ctr">
+            <a:lvl7pPr marL="2743131" indent="0" algn="ctr">
               <a:buNone/>
               <a:defRPr>
                 <a:solidFill>
@@ -260,7 +275,7 @@
                 </a:solidFill>
               </a:defRPr>
             </a:lvl7pPr>
-            <a:lvl8pPr marL="3200400" indent="0" algn="ctr">
+            <a:lvl8pPr marL="3200320" indent="0" algn="ctr">
               <a:buNone/>
               <a:defRPr>
                 <a:solidFill>
@@ -270,7 +285,7 @@
                 </a:solidFill>
               </a:defRPr>
             </a:lvl8pPr>
-            <a:lvl9pPr marL="3657600" indent="0" algn="ctr">
+            <a:lvl9pPr marL="3657509" indent="0" algn="ctr">
               <a:buNone/>
               <a:defRPr>
                 <a:solidFill>
@@ -283,10 +298,9 @@
           </a:lstStyle>
           <a:p>
             <a:r>
-              <a:rPr lang="en-US" smtClean="0"/>
+              <a:rPr lang="en-US"/>
               <a:t>Click to edit Master subtitle style</a:t>
             </a:r>
-            <a:endParaRPr lang="en-US"/>
           </a:p>
         </p:txBody>
       </p:sp>
@@ -307,7 +321,7 @@
           <a:p>
             <a:fld id="{5BCAD085-E8A6-8845-BD4E-CB4CCA059FC4}" type="datetimeFigureOut">
               <a:rPr lang="en-US" smtClean="0"/>
-              <a:t>1/27/13</a:t>
+              <a:t>9/29/2026</a:t>
             </a:fld>
             <a:endParaRPr lang="en-US"/>
           </a:p>
@@ -323,7 +337,12 @@
             <p:ph type="ftr" sz="quarter" idx="11"/>
           </p:nvPr>
         </p:nvSpPr>
-        <p:spPr/>
+        <p:spPr>
+          <a:xfrm>
+            <a:off x="4648200" y="6356354"/>
+            <a:ext cx="2895600" cy="365125"/>
+          </a:xfrm>
+        </p:spPr>
         <p:txBody>
           <a:bodyPr/>
           <a:lstStyle/>
@@ -342,7 +361,12 @@
             <p:ph type="sldNum" sz="quarter" idx="12"/>
           </p:nvPr>
         </p:nvSpPr>
-        <p:spPr/>
+        <p:spPr>
+          <a:xfrm>
+            <a:off x="9601200" y="6356354"/>
+            <a:ext cx="2133600" cy="365125"/>
+          </a:xfrm>
+        </p:spPr>
         <p:txBody>
           <a:bodyPr/>
           <a:lstStyle/>
@@ -401,10 +425,9 @@
           <a:lstStyle/>
           <a:p>
             <a:r>
-              <a:rPr lang="en-US" smtClean="0"/>
+              <a:rPr lang="en-US"/>
               <a:t>Click to edit Master title style</a:t>
             </a:r>
-            <a:endParaRPr lang="en-US"/>
           </a:p>
         </p:txBody>
       </p:sp>
@@ -425,38 +448,37 @@
           <a:p>
             <a:pPr lvl="0"/>
             <a:r>
-              <a:rPr lang="en-US" smtClean="0"/>
+              <a:rPr lang="en-US"/>
               <a:t>Click to edit Master text styles</a:t>
             </a:r>
           </a:p>
           <a:p>
             <a:pPr lvl="1"/>
             <a:r>
-              <a:rPr lang="en-US" smtClean="0"/>
+              <a:rPr lang="en-US"/>
               <a:t>Second level</a:t>
             </a:r>
           </a:p>
           <a:p>
             <a:pPr lvl="2"/>
             <a:r>
-              <a:rPr lang="en-US" smtClean="0"/>
+              <a:rPr lang="en-US"/>
               <a:t>Third level</a:t>
             </a:r>
           </a:p>
           <a:p>
             <a:pPr lvl="3"/>
             <a:r>
-              <a:rPr lang="en-US" smtClean="0"/>
+              <a:rPr lang="en-US"/>
               <a:t>Fourth level</a:t>
             </a:r>
           </a:p>
           <a:p>
             <a:pPr lvl="4"/>
             <a:r>
-              <a:rPr lang="en-US" smtClean="0"/>
+              <a:rPr lang="en-US"/>
               <a:t>Fifth level</a:t>
             </a:r>
-            <a:endParaRPr lang="en-US"/>
           </a:p>
         </p:txBody>
       </p:sp>
@@ -477,7 +499,7 @@
           <a:p>
             <a:fld id="{5BCAD085-E8A6-8845-BD4E-CB4CCA059FC4}" type="datetimeFigureOut">
               <a:rPr lang="en-US" smtClean="0"/>
-              <a:t>1/27/13</a:t>
+              <a:t>9/29/2026</a:t>
             </a:fld>
             <a:endParaRPr lang="en-US"/>
           </a:p>
@@ -567,7 +589,7 @@
         </p:nvSpPr>
         <p:spPr>
           <a:xfrm>
-            <a:off x="6629400" y="274638"/>
+            <a:off x="6629400" y="274642"/>
             <a:ext cx="2057400" cy="5851525"/>
           </a:xfrm>
         </p:spPr>
@@ -576,10 +598,9 @@
           <a:lstStyle/>
           <a:p>
             <a:r>
-              <a:rPr lang="en-US" smtClean="0"/>
+              <a:rPr lang="en-US"/>
               <a:t>Click to edit Master title style</a:t>
             </a:r>
-            <a:endParaRPr lang="en-US"/>
           </a:p>
         </p:txBody>
       </p:sp>
@@ -595,7 +616,7 @@
         </p:nvSpPr>
         <p:spPr>
           <a:xfrm>
-            <a:off x="457200" y="274638"/>
+            <a:off x="457200" y="274642"/>
             <a:ext cx="6019800" cy="5851525"/>
           </a:xfrm>
         </p:spPr>
@@ -605,38 +626,37 @@
           <a:p>
             <a:pPr lvl="0"/>
             <a:r>
-              <a:rPr lang="en-US" smtClean="0"/>
+              <a:rPr lang="en-US"/>
               <a:t>Click to edit Master text styles</a:t>
             </a:r>
           </a:p>
           <a:p>
             <a:pPr lvl="1"/>
             <a:r>
-              <a:rPr lang="en-US" smtClean="0"/>
+              <a:rPr lang="en-US"/>
               <a:t>Second level</a:t>
             </a:r>
           </a:p>
           <a:p>
             <a:pPr lvl="2"/>
             <a:r>
-              <a:rPr lang="en-US" smtClean="0"/>
+              <a:rPr lang="en-US"/>
               <a:t>Third level</a:t>
             </a:r>
           </a:p>
           <a:p>
             <a:pPr lvl="3"/>
             <a:r>
-              <a:rPr lang="en-US" smtClean="0"/>
+              <a:rPr lang="en-US"/>
               <a:t>Fourth level</a:t>
             </a:r>
           </a:p>
           <a:p>
             <a:pPr lvl="4"/>
             <a:r>
-              <a:rPr lang="en-US" smtClean="0"/>
+              <a:rPr lang="en-US"/>
               <a:t>Fifth level</a:t>
             </a:r>
-            <a:endParaRPr lang="en-US"/>
           </a:p>
         </p:txBody>
       </p:sp>
@@ -657,7 +677,7 @@
           <a:p>
             <a:fld id="{5BCAD085-E8A6-8845-BD4E-CB4CCA059FC4}" type="datetimeFigureOut">
               <a:rPr lang="en-US" smtClean="0"/>
-              <a:t>1/27/13</a:t>
+              <a:t>9/29/2026</a:t>
             </a:fld>
             <a:endParaRPr lang="en-US"/>
           </a:p>
@@ -751,10 +771,9 @@
           <a:lstStyle/>
           <a:p>
             <a:r>
-              <a:rPr lang="en-US" smtClean="0"/>
+              <a:rPr lang="en-US"/>
               <a:t>Click to edit Master title style</a:t>
             </a:r>
-            <a:endParaRPr lang="en-US"/>
           </a:p>
         </p:txBody>
       </p:sp>
@@ -775,38 +794,37 @@
           <a:p>
             <a:pPr lvl="0"/>
             <a:r>
-              <a:rPr lang="en-US" smtClean="0"/>
+              <a:rPr lang="en-US"/>
               <a:t>Click to edit Master text styles</a:t>
             </a:r>
           </a:p>
           <a:p>
             <a:pPr lvl="1"/>
             <a:r>
-              <a:rPr lang="en-US" smtClean="0"/>
+              <a:rPr lang="en-US"/>
               <a:t>Second level</a:t>
             </a:r>
           </a:p>
           <a:p>
             <a:pPr lvl="2"/>
             <a:r>
-              <a:rPr lang="en-US" smtClean="0"/>
+              <a:rPr lang="en-US"/>
               <a:t>Third level</a:t>
             </a:r>
           </a:p>
           <a:p>
             <a:pPr lvl="3"/>
             <a:r>
-              <a:rPr lang="en-US" smtClean="0"/>
+              <a:rPr lang="en-US"/>
               <a:t>Fourth level</a:t>
             </a:r>
           </a:p>
           <a:p>
             <a:pPr lvl="4"/>
             <a:r>
-              <a:rPr lang="en-US" smtClean="0"/>
+              <a:rPr lang="en-US"/>
               <a:t>Fifth level</a:t>
             </a:r>
-            <a:endParaRPr lang="en-US"/>
           </a:p>
         </p:txBody>
       </p:sp>
@@ -827,7 +845,7 @@
           <a:p>
             <a:fld id="{5BCAD085-E8A6-8845-BD4E-CB4CCA059FC4}" type="datetimeFigureOut">
               <a:rPr lang="en-US" smtClean="0"/>
-              <a:t>1/27/13</a:t>
+              <a:t>9/29/2026</a:t>
             </a:fld>
             <a:endParaRPr lang="en-US"/>
           </a:p>
@@ -917,7 +935,7 @@
         </p:nvSpPr>
         <p:spPr>
           <a:xfrm>
-            <a:off x="722313" y="4406900"/>
+            <a:off x="722313" y="4406904"/>
             <a:ext cx="7772400" cy="1362075"/>
           </a:xfrm>
         </p:spPr>
@@ -930,10 +948,9 @@
           </a:lstStyle>
           <a:p>
             <a:r>
-              <a:rPr lang="en-US" smtClean="0"/>
+              <a:rPr lang="en-US"/>
               <a:t>Click to edit Master title style</a:t>
             </a:r>
-            <a:endParaRPr lang="en-US"/>
           </a:p>
         </p:txBody>
       </p:sp>
@@ -966,7 +983,7 @@
                 </a:solidFill>
               </a:defRPr>
             </a:lvl1pPr>
-            <a:lvl2pPr marL="457200" indent="0">
+            <a:lvl2pPr marL="457189" indent="0">
               <a:buNone/>
               <a:defRPr sz="1800">
                 <a:solidFill>
@@ -976,7 +993,7 @@
                 </a:solidFill>
               </a:defRPr>
             </a:lvl2pPr>
-            <a:lvl3pPr marL="914400" indent="0">
+            <a:lvl3pPr marL="914377" indent="0">
               <a:buNone/>
               <a:defRPr sz="1600">
                 <a:solidFill>
@@ -986,7 +1003,7 @@
                 </a:solidFill>
               </a:defRPr>
             </a:lvl3pPr>
-            <a:lvl4pPr marL="1371600" indent="0">
+            <a:lvl4pPr marL="1371566" indent="0">
               <a:buNone/>
               <a:defRPr sz="1400">
                 <a:solidFill>
@@ -996,7 +1013,7 @@
                 </a:solidFill>
               </a:defRPr>
             </a:lvl4pPr>
-            <a:lvl5pPr marL="1828800" indent="0">
+            <a:lvl5pPr marL="1828754" indent="0">
               <a:buNone/>
               <a:defRPr sz="1400">
                 <a:solidFill>
@@ -1006,7 +1023,7 @@
                 </a:solidFill>
               </a:defRPr>
             </a:lvl5pPr>
-            <a:lvl6pPr marL="2286000" indent="0">
+            <a:lvl6pPr marL="2285943" indent="0">
               <a:buNone/>
               <a:defRPr sz="1400">
                 <a:solidFill>
@@ -1016,7 +1033,7 @@
                 </a:solidFill>
               </a:defRPr>
             </a:lvl6pPr>
-            <a:lvl7pPr marL="2743200" indent="0">
+            <a:lvl7pPr marL="2743131" indent="0">
               <a:buNone/>
               <a:defRPr sz="1400">
                 <a:solidFill>
@@ -1026,7 +1043,7 @@
                 </a:solidFill>
               </a:defRPr>
             </a:lvl7pPr>
-            <a:lvl8pPr marL="3200400" indent="0">
+            <a:lvl8pPr marL="3200320" indent="0">
               <a:buNone/>
               <a:defRPr sz="1400">
                 <a:solidFill>
@@ -1036,7 +1053,7 @@
                 </a:solidFill>
               </a:defRPr>
             </a:lvl8pPr>
-            <a:lvl9pPr marL="3657600" indent="0">
+            <a:lvl9pPr marL="3657509" indent="0">
               <a:buNone/>
               <a:defRPr sz="1400">
                 <a:solidFill>
@@ -1050,7 +1067,7 @@
           <a:p>
             <a:pPr lvl="0"/>
             <a:r>
-              <a:rPr lang="en-US" smtClean="0"/>
+              <a:rPr lang="en-US"/>
               <a:t>Click to edit Master text styles</a:t>
             </a:r>
           </a:p>
@@ -1073,7 +1090,7 @@
           <a:p>
             <a:fld id="{5BCAD085-E8A6-8845-BD4E-CB4CCA059FC4}" type="datetimeFigureOut">
               <a:rPr lang="en-US" smtClean="0"/>
-              <a:t>1/27/13</a:t>
+              <a:t>9/29/2026</a:t>
             </a:fld>
             <a:endParaRPr lang="en-US"/>
           </a:p>
@@ -1167,10 +1184,9 @@
           <a:lstStyle/>
           <a:p>
             <a:r>
-              <a:rPr lang="en-US" smtClean="0"/>
+              <a:rPr lang="en-US"/>
               <a:t>Click to edit Master title style</a:t>
             </a:r>
-            <a:endParaRPr lang="en-US"/>
           </a:p>
         </p:txBody>
       </p:sp>
@@ -1186,7 +1202,7 @@
         </p:nvSpPr>
         <p:spPr>
           <a:xfrm>
-            <a:off x="457200" y="1600200"/>
+            <a:off x="457200" y="1600204"/>
             <a:ext cx="4038600" cy="4525963"/>
           </a:xfrm>
         </p:spPr>
@@ -1224,38 +1240,37 @@
           <a:p>
             <a:pPr lvl="0"/>
             <a:r>
-              <a:rPr lang="en-US" smtClean="0"/>
+              <a:rPr lang="en-US"/>
               <a:t>Click to edit Master text styles</a:t>
             </a:r>
           </a:p>
           <a:p>
             <a:pPr lvl="1"/>
             <a:r>
-              <a:rPr lang="en-US" smtClean="0"/>
+              <a:rPr lang="en-US"/>
               <a:t>Second level</a:t>
             </a:r>
           </a:p>
           <a:p>
             <a:pPr lvl="2"/>
             <a:r>
-              <a:rPr lang="en-US" smtClean="0"/>
+              <a:rPr lang="en-US"/>
               <a:t>Third level</a:t>
             </a:r>
           </a:p>
           <a:p>
             <a:pPr lvl="3"/>
             <a:r>
-              <a:rPr lang="en-US" smtClean="0"/>
+              <a:rPr lang="en-US"/>
               <a:t>Fourth level</a:t>
             </a:r>
           </a:p>
           <a:p>
             <a:pPr lvl="4"/>
             <a:r>
-              <a:rPr lang="en-US" smtClean="0"/>
+              <a:rPr lang="en-US"/>
               <a:t>Fifth level</a:t>
             </a:r>
-            <a:endParaRPr lang="en-US"/>
           </a:p>
         </p:txBody>
       </p:sp>
@@ -1271,7 +1286,7 @@
         </p:nvSpPr>
         <p:spPr>
           <a:xfrm>
-            <a:off x="4648200" y="1600200"/>
+            <a:off x="4648200" y="1600204"/>
             <a:ext cx="4038600" cy="4525963"/>
           </a:xfrm>
         </p:spPr>
@@ -1309,38 +1324,37 @@
           <a:p>
             <a:pPr lvl="0"/>
             <a:r>
-              <a:rPr lang="en-US" smtClean="0"/>
+              <a:rPr lang="en-US"/>
               <a:t>Click to edit Master text styles</a:t>
             </a:r>
           </a:p>
           <a:p>
             <a:pPr lvl="1"/>
             <a:r>
-              <a:rPr lang="en-US" smtClean="0"/>
+              <a:rPr lang="en-US"/>
               <a:t>Second level</a:t>
             </a:r>
           </a:p>
           <a:p>
             <a:pPr lvl="2"/>
             <a:r>
-              <a:rPr lang="en-US" smtClean="0"/>
+              <a:rPr lang="en-US"/>
               <a:t>Third level</a:t>
             </a:r>
           </a:p>
           <a:p>
             <a:pPr lvl="3"/>
             <a:r>
-              <a:rPr lang="en-US" smtClean="0"/>
+              <a:rPr lang="en-US"/>
               <a:t>Fourth level</a:t>
             </a:r>
           </a:p>
           <a:p>
             <a:pPr lvl="4"/>
             <a:r>
-              <a:rPr lang="en-US" smtClean="0"/>
+              <a:rPr lang="en-US"/>
               <a:t>Fifth level</a:t>
             </a:r>
-            <a:endParaRPr lang="en-US"/>
           </a:p>
         </p:txBody>
       </p:sp>
@@ -1361,7 +1375,7 @@
           <a:p>
             <a:fld id="{5BCAD085-E8A6-8845-BD4E-CB4CCA059FC4}" type="datetimeFigureOut">
               <a:rPr lang="en-US" smtClean="0"/>
-              <a:t>1/27/13</a:t>
+              <a:t>9/29/2026</a:t>
             </a:fld>
             <a:endParaRPr lang="en-US"/>
           </a:p>
@@ -1459,10 +1473,9 @@
           </a:lstStyle>
           <a:p>
             <a:r>
-              <a:rPr lang="en-US" smtClean="0"/>
+              <a:rPr lang="en-US"/>
               <a:t>Click to edit Master title style</a:t>
             </a:r>
-            <a:endParaRPr lang="en-US"/>
           </a:p>
         </p:txBody>
       </p:sp>
@@ -1478,7 +1491,7 @@
         </p:nvSpPr>
         <p:spPr>
           <a:xfrm>
-            <a:off x="457200" y="1535113"/>
+            <a:off x="457202" y="1535113"/>
             <a:ext cx="4040188" cy="639762"/>
           </a:xfrm>
         </p:spPr>
@@ -1489,35 +1502,35 @@
               <a:buNone/>
               <a:defRPr sz="2400" b="1"/>
             </a:lvl1pPr>
-            <a:lvl2pPr marL="457200" indent="0">
+            <a:lvl2pPr marL="457189" indent="0">
               <a:buNone/>
               <a:defRPr sz="2000" b="1"/>
             </a:lvl2pPr>
-            <a:lvl3pPr marL="914400" indent="0">
+            <a:lvl3pPr marL="914377" indent="0">
               <a:buNone/>
               <a:defRPr sz="1800" b="1"/>
             </a:lvl3pPr>
-            <a:lvl4pPr marL="1371600" indent="0">
+            <a:lvl4pPr marL="1371566" indent="0">
               <a:buNone/>
               <a:defRPr sz="1600" b="1"/>
             </a:lvl4pPr>
-            <a:lvl5pPr marL="1828800" indent="0">
+            <a:lvl5pPr marL="1828754" indent="0">
               <a:buNone/>
               <a:defRPr sz="1600" b="1"/>
             </a:lvl5pPr>
-            <a:lvl6pPr marL="2286000" indent="0">
+            <a:lvl6pPr marL="2285943" indent="0">
               <a:buNone/>
               <a:defRPr sz="1600" b="1"/>
             </a:lvl6pPr>
-            <a:lvl7pPr marL="2743200" indent="0">
+            <a:lvl7pPr marL="2743131" indent="0">
               <a:buNone/>
               <a:defRPr sz="1600" b="1"/>
             </a:lvl7pPr>
-            <a:lvl8pPr marL="3200400" indent="0">
+            <a:lvl8pPr marL="3200320" indent="0">
               <a:buNone/>
               <a:defRPr sz="1600" b="1"/>
             </a:lvl8pPr>
-            <a:lvl9pPr marL="3657600" indent="0">
+            <a:lvl9pPr marL="3657509" indent="0">
               <a:buNone/>
               <a:defRPr sz="1600" b="1"/>
             </a:lvl9pPr>
@@ -1525,7 +1538,7 @@
           <a:p>
             <a:pPr lvl="0"/>
             <a:r>
-              <a:rPr lang="en-US" smtClean="0"/>
+              <a:rPr lang="en-US"/>
               <a:t>Click to edit Master text styles</a:t>
             </a:r>
           </a:p>
@@ -1543,7 +1556,7 @@
         </p:nvSpPr>
         <p:spPr>
           <a:xfrm>
-            <a:off x="457200" y="2174875"/>
+            <a:off x="457202" y="2174875"/>
             <a:ext cx="4040188" cy="3951288"/>
           </a:xfrm>
         </p:spPr>
@@ -1581,38 +1594,37 @@
           <a:p>
             <a:pPr lvl="0"/>
             <a:r>
-              <a:rPr lang="en-US" smtClean="0"/>
+              <a:rPr lang="en-US"/>
               <a:t>Click to edit Master text styles</a:t>
             </a:r>
           </a:p>
           <a:p>
             <a:pPr lvl="1"/>
             <a:r>
-              <a:rPr lang="en-US" smtClean="0"/>
+              <a:rPr lang="en-US"/>
               <a:t>Second level</a:t>
             </a:r>
           </a:p>
           <a:p>
             <a:pPr lvl="2"/>
             <a:r>
-              <a:rPr lang="en-US" smtClean="0"/>
+              <a:rPr lang="en-US"/>
               <a:t>Third level</a:t>
             </a:r>
           </a:p>
           <a:p>
             <a:pPr lvl="3"/>
             <a:r>
-              <a:rPr lang="en-US" smtClean="0"/>
+              <a:rPr lang="en-US"/>
               <a:t>Fourth level</a:t>
             </a:r>
           </a:p>
           <a:p>
             <a:pPr lvl="4"/>
             <a:r>
-              <a:rPr lang="en-US" smtClean="0"/>
+              <a:rPr lang="en-US"/>
               <a:t>Fifth level</a:t>
             </a:r>
-            <a:endParaRPr lang="en-US"/>
           </a:p>
         </p:txBody>
       </p:sp>
@@ -1628,7 +1640,7 @@
         </p:nvSpPr>
         <p:spPr>
           <a:xfrm>
-            <a:off x="4645025" y="1535113"/>
+            <a:off x="4645027" y="1535113"/>
             <a:ext cx="4041775" cy="639762"/>
           </a:xfrm>
         </p:spPr>
@@ -1639,35 +1651,35 @@
               <a:buNone/>
               <a:defRPr sz="2400" b="1"/>
             </a:lvl1pPr>
-            <a:lvl2pPr marL="457200" indent="0">
+            <a:lvl2pPr marL="457189" indent="0">
               <a:buNone/>
               <a:defRPr sz="2000" b="1"/>
             </a:lvl2pPr>
-            <a:lvl3pPr marL="914400" indent="0">
+            <a:lvl3pPr marL="914377" indent="0">
               <a:buNone/>
               <a:defRPr sz="1800" b="1"/>
             </a:lvl3pPr>
-            <a:lvl4pPr marL="1371600" indent="0">
+            <a:lvl4pPr marL="1371566" indent="0">
               <a:buNone/>
               <a:defRPr sz="1600" b="1"/>
             </a:lvl4pPr>
-            <a:lvl5pPr marL="1828800" indent="0">
+            <a:lvl5pPr marL="1828754" indent="0">
               <a:buNone/>
               <a:defRPr sz="1600" b="1"/>
             </a:lvl5pPr>
-            <a:lvl6pPr marL="2286000" indent="0">
+            <a:lvl6pPr marL="2285943" indent="0">
               <a:buNone/>
               <a:defRPr sz="1600" b="1"/>
             </a:lvl6pPr>
-            <a:lvl7pPr marL="2743200" indent="0">
+            <a:lvl7pPr marL="2743131" indent="0">
               <a:buNone/>
               <a:defRPr sz="1600" b="1"/>
             </a:lvl7pPr>
-            <a:lvl8pPr marL="3200400" indent="0">
+            <a:lvl8pPr marL="3200320" indent="0">
               <a:buNone/>
               <a:defRPr sz="1600" b="1"/>
             </a:lvl8pPr>
-            <a:lvl9pPr marL="3657600" indent="0">
+            <a:lvl9pPr marL="3657509" indent="0">
               <a:buNone/>
               <a:defRPr sz="1600" b="1"/>
             </a:lvl9pPr>
@@ -1675,7 +1687,7 @@
           <a:p>
             <a:pPr lvl="0"/>
             <a:r>
-              <a:rPr lang="en-US" smtClean="0"/>
+              <a:rPr lang="en-US"/>
               <a:t>Click to edit Master text styles</a:t>
             </a:r>
           </a:p>
@@ -1693,7 +1705,7 @@
         </p:nvSpPr>
         <p:spPr>
           <a:xfrm>
-            <a:off x="4645025" y="2174875"/>
+            <a:off x="4645027" y="2174875"/>
             <a:ext cx="4041775" cy="3951288"/>
           </a:xfrm>
         </p:spPr>
@@ -1731,38 +1743,37 @@
           <a:p>
             <a:pPr lvl="0"/>
             <a:r>
-              <a:rPr lang="en-US" smtClean="0"/>
+              <a:rPr lang="en-US"/>
               <a:t>Click to edit Master text styles</a:t>
             </a:r>
           </a:p>
           <a:p>
             <a:pPr lvl="1"/>
             <a:r>
-              <a:rPr lang="en-US" smtClean="0"/>
+              <a:rPr lang="en-US"/>
               <a:t>Second level</a:t>
             </a:r>
           </a:p>
           <a:p>
             <a:pPr lvl="2"/>
             <a:r>
-              <a:rPr lang="en-US" smtClean="0"/>
+              <a:rPr lang="en-US"/>
               <a:t>Third level</a:t>
             </a:r>
           </a:p>
           <a:p>
             <a:pPr lvl="3"/>
             <a:r>
-              <a:rPr lang="en-US" smtClean="0"/>
+              <a:rPr lang="en-US"/>
               <a:t>Fourth level</a:t>
             </a:r>
           </a:p>
           <a:p>
             <a:pPr lvl="4"/>
             <a:r>
-              <a:rPr lang="en-US" smtClean="0"/>
+              <a:rPr lang="en-US"/>
               <a:t>Fifth level</a:t>
             </a:r>
-            <a:endParaRPr lang="en-US"/>
           </a:p>
         </p:txBody>
       </p:sp>
@@ -1783,7 +1794,7 @@
           <a:p>
             <a:fld id="{5BCAD085-E8A6-8845-BD4E-CB4CCA059FC4}" type="datetimeFigureOut">
               <a:rPr lang="en-US" smtClean="0"/>
-              <a:t>1/27/13</a:t>
+              <a:t>9/29/2026</a:t>
             </a:fld>
             <a:endParaRPr lang="en-US"/>
           </a:p>
@@ -1877,10 +1888,9 @@
           <a:lstStyle/>
           <a:p>
             <a:r>
-              <a:rPr lang="en-US" smtClean="0"/>
+              <a:rPr lang="en-US"/>
               <a:t>Click to edit Master title style</a:t>
             </a:r>
-            <a:endParaRPr lang="en-US"/>
           </a:p>
         </p:txBody>
       </p:sp>
@@ -1901,7 +1911,7 @@
           <a:p>
             <a:fld id="{5BCAD085-E8A6-8845-BD4E-CB4CCA059FC4}" type="datetimeFigureOut">
               <a:rPr lang="en-US" smtClean="0"/>
-              <a:t>1/27/13</a:t>
+              <a:t>9/29/2026</a:t>
             </a:fld>
             <a:endParaRPr lang="en-US"/>
           </a:p>
@@ -1996,7 +2006,7 @@
           <a:p>
             <a:fld id="{5BCAD085-E8A6-8845-BD4E-CB4CCA059FC4}" type="datetimeFigureOut">
               <a:rPr lang="en-US" smtClean="0"/>
-              <a:t>1/27/13</a:t>
+              <a:t>9/29/2026</a:t>
             </a:fld>
             <a:endParaRPr lang="en-US"/>
           </a:p>
@@ -2086,7 +2096,7 @@
         </p:nvSpPr>
         <p:spPr>
           <a:xfrm>
-            <a:off x="457200" y="273050"/>
+            <a:off x="457202" y="273050"/>
             <a:ext cx="3008313" cy="1162050"/>
           </a:xfrm>
         </p:spPr>
@@ -2099,10 +2109,9 @@
           </a:lstStyle>
           <a:p>
             <a:r>
-              <a:rPr lang="en-US" smtClean="0"/>
+              <a:rPr lang="en-US"/>
               <a:t>Click to edit Master title style</a:t>
             </a:r>
-            <a:endParaRPr lang="en-US"/>
           </a:p>
         </p:txBody>
       </p:sp>
@@ -2118,8 +2127,8 @@
         </p:nvSpPr>
         <p:spPr>
           <a:xfrm>
-            <a:off x="3575050" y="273050"/>
-            <a:ext cx="5111750" cy="5853113"/>
+            <a:off x="3575051" y="273054"/>
+            <a:ext cx="5111751" cy="5853113"/>
           </a:xfrm>
         </p:spPr>
         <p:txBody>
@@ -2156,38 +2165,37 @@
           <a:p>
             <a:pPr lvl="0"/>
             <a:r>
-              <a:rPr lang="en-US" smtClean="0"/>
+              <a:rPr lang="en-US"/>
               <a:t>Click to edit Master text styles</a:t>
             </a:r>
           </a:p>
           <a:p>
             <a:pPr lvl="1"/>
             <a:r>
-              <a:rPr lang="en-US" smtClean="0"/>
+              <a:rPr lang="en-US"/>
               <a:t>Second level</a:t>
             </a:r>
           </a:p>
           <a:p>
             <a:pPr lvl="2"/>
             <a:r>
-              <a:rPr lang="en-US" smtClean="0"/>
+              <a:rPr lang="en-US"/>
               <a:t>Third level</a:t>
             </a:r>
           </a:p>
           <a:p>
             <a:pPr lvl="3"/>
             <a:r>
-              <a:rPr lang="en-US" smtClean="0"/>
+              <a:rPr lang="en-US"/>
               <a:t>Fourth level</a:t>
             </a:r>
           </a:p>
           <a:p>
             <a:pPr lvl="4"/>
             <a:r>
-              <a:rPr lang="en-US" smtClean="0"/>
+              <a:rPr lang="en-US"/>
               <a:t>Fifth level</a:t>
             </a:r>
-            <a:endParaRPr lang="en-US"/>
           </a:p>
         </p:txBody>
       </p:sp>
@@ -2203,7 +2211,7 @@
         </p:nvSpPr>
         <p:spPr>
           <a:xfrm>
-            <a:off x="457200" y="1435100"/>
+            <a:off x="457202" y="1435103"/>
             <a:ext cx="3008313" cy="4691063"/>
           </a:xfrm>
         </p:spPr>
@@ -2214,35 +2222,35 @@
               <a:buNone/>
               <a:defRPr sz="1400"/>
             </a:lvl1pPr>
-            <a:lvl2pPr marL="457200" indent="0">
+            <a:lvl2pPr marL="457189" indent="0">
               <a:buNone/>
               <a:defRPr sz="1200"/>
             </a:lvl2pPr>
-            <a:lvl3pPr marL="914400" indent="0">
+            <a:lvl3pPr marL="914377" indent="0">
               <a:buNone/>
               <a:defRPr sz="1000"/>
             </a:lvl3pPr>
-            <a:lvl4pPr marL="1371600" indent="0">
+            <a:lvl4pPr marL="1371566" indent="0">
               <a:buNone/>
               <a:defRPr sz="900"/>
             </a:lvl4pPr>
-            <a:lvl5pPr marL="1828800" indent="0">
+            <a:lvl5pPr marL="1828754" indent="0">
               <a:buNone/>
               <a:defRPr sz="900"/>
             </a:lvl5pPr>
-            <a:lvl6pPr marL="2286000" indent="0">
+            <a:lvl6pPr marL="2285943" indent="0">
               <a:buNone/>
               <a:defRPr sz="900"/>
             </a:lvl6pPr>
-            <a:lvl7pPr marL="2743200" indent="0">
+            <a:lvl7pPr marL="2743131" indent="0">
               <a:buNone/>
               <a:defRPr sz="900"/>
             </a:lvl7pPr>
-            <a:lvl8pPr marL="3200400" indent="0">
+            <a:lvl8pPr marL="3200320" indent="0">
               <a:buNone/>
               <a:defRPr sz="900"/>
             </a:lvl8pPr>
-            <a:lvl9pPr marL="3657600" indent="0">
+            <a:lvl9pPr marL="3657509" indent="0">
               <a:buNone/>
               <a:defRPr sz="900"/>
             </a:lvl9pPr>
@@ -2250,7 +2258,7 @@
           <a:p>
             <a:pPr lvl="0"/>
             <a:r>
-              <a:rPr lang="en-US" smtClean="0"/>
+              <a:rPr lang="en-US"/>
               <a:t>Click to edit Master text styles</a:t>
             </a:r>
           </a:p>
@@ -2273,7 +2281,7 @@
           <a:p>
             <a:fld id="{5BCAD085-E8A6-8845-BD4E-CB4CCA059FC4}" type="datetimeFigureOut">
               <a:rPr lang="en-US" smtClean="0"/>
-              <a:t>1/27/13</a:t>
+              <a:t>9/29/2026</a:t>
             </a:fld>
             <a:endParaRPr lang="en-US"/>
           </a:p>
@@ -2376,10 +2384,9 @@
           </a:lstStyle>
           <a:p>
             <a:r>
-              <a:rPr lang="en-US" smtClean="0"/>
+              <a:rPr lang="en-US"/>
               <a:t>Click to edit Master title style</a:t>
             </a:r>
-            <a:endParaRPr lang="en-US"/>
           </a:p>
         </p:txBody>
       </p:sp>
@@ -2406,35 +2413,35 @@
               <a:buNone/>
               <a:defRPr sz="3200"/>
             </a:lvl1pPr>
-            <a:lvl2pPr marL="457200" indent="0">
+            <a:lvl2pPr marL="457189" indent="0">
               <a:buNone/>
               <a:defRPr sz="2800"/>
             </a:lvl2pPr>
-            <a:lvl3pPr marL="914400" indent="0">
+            <a:lvl3pPr marL="914377" indent="0">
               <a:buNone/>
               <a:defRPr sz="2400"/>
             </a:lvl3pPr>
-            <a:lvl4pPr marL="1371600" indent="0">
+            <a:lvl4pPr marL="1371566" indent="0">
               <a:buNone/>
               <a:defRPr sz="2000"/>
             </a:lvl4pPr>
-            <a:lvl5pPr marL="1828800" indent="0">
+            <a:lvl5pPr marL="1828754" indent="0">
               <a:buNone/>
               <a:defRPr sz="2000"/>
             </a:lvl5pPr>
-            <a:lvl6pPr marL="2286000" indent="0">
+            <a:lvl6pPr marL="2285943" indent="0">
               <a:buNone/>
               <a:defRPr sz="2000"/>
             </a:lvl6pPr>
-            <a:lvl7pPr marL="2743200" indent="0">
+            <a:lvl7pPr marL="2743131" indent="0">
               <a:buNone/>
               <a:defRPr sz="2000"/>
             </a:lvl7pPr>
-            <a:lvl8pPr marL="3200400" indent="0">
+            <a:lvl8pPr marL="3200320" indent="0">
               <a:buNone/>
               <a:defRPr sz="2000"/>
             </a:lvl8pPr>
-            <a:lvl9pPr marL="3657600" indent="0">
+            <a:lvl9pPr marL="3657509" indent="0">
               <a:buNone/>
               <a:defRPr sz="2000"/>
             </a:lvl9pPr>
@@ -2467,35 +2474,35 @@
               <a:buNone/>
               <a:defRPr sz="1400"/>
             </a:lvl1pPr>
-            <a:lvl2pPr marL="457200" indent="0">
+            <a:lvl2pPr marL="457189" indent="0">
               <a:buNone/>
               <a:defRPr sz="1200"/>
             </a:lvl2pPr>
-            <a:lvl3pPr marL="914400" indent="0">
+            <a:lvl3pPr marL="914377" indent="0">
               <a:buNone/>
               <a:defRPr sz="1000"/>
             </a:lvl3pPr>
-            <a:lvl4pPr marL="1371600" indent="0">
+            <a:lvl4pPr marL="1371566" indent="0">
               <a:buNone/>
               <a:defRPr sz="900"/>
             </a:lvl4pPr>
-            <a:lvl5pPr marL="1828800" indent="0">
+            <a:lvl5pPr marL="1828754" indent="0">
               <a:buNone/>
               <a:defRPr sz="900"/>
             </a:lvl5pPr>
-            <a:lvl6pPr marL="2286000" indent="0">
+            <a:lvl6pPr marL="2285943" indent="0">
               <a:buNone/>
               <a:defRPr sz="900"/>
             </a:lvl6pPr>
-            <a:lvl7pPr marL="2743200" indent="0">
+            <a:lvl7pPr marL="2743131" indent="0">
               <a:buNone/>
               <a:defRPr sz="900"/>
             </a:lvl7pPr>
-            <a:lvl8pPr marL="3200400" indent="0">
+            <a:lvl8pPr marL="3200320" indent="0">
               <a:buNone/>
               <a:defRPr sz="900"/>
             </a:lvl8pPr>
-            <a:lvl9pPr marL="3657600" indent="0">
+            <a:lvl9pPr marL="3657509" indent="0">
               <a:buNone/>
               <a:defRPr sz="900"/>
             </a:lvl9pPr>
@@ -2503,7 +2510,7 @@
           <a:p>
             <a:pPr lvl="0"/>
             <a:r>
-              <a:rPr lang="en-US" smtClean="0"/>
+              <a:rPr lang="en-US"/>
               <a:t>Click to edit Master text styles</a:t>
             </a:r>
           </a:p>
@@ -2526,7 +2533,7 @@
           <a:p>
             <a:fld id="{5BCAD085-E8A6-8845-BD4E-CB4CCA059FC4}" type="datetimeFigureOut">
               <a:rPr lang="en-US" smtClean="0"/>
-              <a:t>1/27/13</a:t>
+              <a:t>9/29/2026</a:t>
             </a:fld>
             <a:endParaRPr lang="en-US"/>
           </a:p>
@@ -2622,7 +2629,7 @@
         <p:spPr>
           <a:xfrm>
             <a:off x="457200" y="274638"/>
-            <a:ext cx="8229600" cy="1143000"/>
+            <a:ext cx="11134436" cy="1143000"/>
           </a:xfrm>
           <a:prstGeom prst="rect">
             <a:avLst/>
@@ -2635,10 +2642,9 @@
           <a:lstStyle/>
           <a:p>
             <a:r>
-              <a:rPr lang="en-US" smtClean="0"/>
+              <a:rPr lang="en-US"/>
               <a:t>Click to edit Master title style</a:t>
             </a:r>
-            <a:endParaRPr lang="en-US"/>
           </a:p>
         </p:txBody>
       </p:sp>
@@ -2654,8 +2660,8 @@
         </p:nvSpPr>
         <p:spPr>
           <a:xfrm>
-            <a:off x="457200" y="1600200"/>
-            <a:ext cx="8229600" cy="4525963"/>
+            <a:off x="457199" y="1600204"/>
+            <a:ext cx="11134435" cy="4525963"/>
           </a:xfrm>
           <a:prstGeom prst="rect">
             <a:avLst/>
@@ -2669,38 +2675,37 @@
           <a:p>
             <a:pPr lvl="0"/>
             <a:r>
-              <a:rPr lang="en-US" smtClean="0"/>
+              <a:rPr lang="en-US"/>
               <a:t>Click to edit Master text styles</a:t>
             </a:r>
           </a:p>
           <a:p>
             <a:pPr lvl="1"/>
             <a:r>
-              <a:rPr lang="en-US" smtClean="0"/>
+              <a:rPr lang="en-US"/>
               <a:t>Second level</a:t>
             </a:r>
           </a:p>
           <a:p>
             <a:pPr lvl="2"/>
             <a:r>
-              <a:rPr lang="en-US" smtClean="0"/>
+              <a:rPr lang="en-US"/>
               <a:t>Third level</a:t>
             </a:r>
           </a:p>
           <a:p>
             <a:pPr lvl="3"/>
             <a:r>
-              <a:rPr lang="en-US" smtClean="0"/>
+              <a:rPr lang="en-US"/>
               <a:t>Fourth level</a:t>
             </a:r>
           </a:p>
           <a:p>
             <a:pPr lvl="4"/>
             <a:r>
-              <a:rPr lang="en-US" smtClean="0"/>
+              <a:rPr lang="en-US"/>
               <a:t>Fifth level</a:t>
             </a:r>
-            <a:endParaRPr lang="en-US"/>
           </a:p>
         </p:txBody>
       </p:sp>
@@ -2716,7 +2721,7 @@
         </p:nvSpPr>
         <p:spPr>
           <a:xfrm>
-            <a:off x="457200" y="6356350"/>
+            <a:off x="457200" y="6356354"/>
             <a:ext cx="2133600" cy="365125"/>
           </a:xfrm>
           <a:prstGeom prst="rect">
@@ -2739,7 +2744,7 @@
           <a:p>
             <a:fld id="{5BCAD085-E8A6-8845-BD4E-CB4CCA059FC4}" type="datetimeFigureOut">
               <a:rPr lang="en-US" smtClean="0"/>
-              <a:t>1/27/13</a:t>
+              <a:t>9/29/2026</a:t>
             </a:fld>
             <a:endParaRPr lang="en-US"/>
           </a:p>
@@ -2757,7 +2762,7 @@
         </p:nvSpPr>
         <p:spPr>
           <a:xfrm>
-            <a:off x="3124200" y="6356350"/>
+            <a:off x="4572000" y="6356354"/>
             <a:ext cx="2895600" cy="365125"/>
           </a:xfrm>
           <a:prstGeom prst="rect">
@@ -2794,7 +2799,7 @@
         </p:nvSpPr>
         <p:spPr>
           <a:xfrm>
-            <a:off x="6553200" y="6356350"/>
+            <a:off x="9458034" y="6356353"/>
             <a:ext cx="2133600" cy="365125"/>
           </a:xfrm>
           <a:prstGeom prst="rect">
@@ -2846,7 +2851,7 @@
   </p:sldLayoutIdLst>
   <p:txStyles>
     <p:titleStyle>
-      <a:lvl1pPr algn="ctr" defTabSz="457200" rtl="0" eaLnBrk="1" latinLnBrk="0" hangingPunct="1">
+      <a:lvl1pPr algn="ctr" defTabSz="457189" rtl="0" eaLnBrk="1" latinLnBrk="0" hangingPunct="1">
         <a:spcBef>
           <a:spcPct val="0"/>
         </a:spcBef>
@@ -2862,7 +2867,7 @@
       </a:lvl1pPr>
     </p:titleStyle>
     <p:bodyStyle>
-      <a:lvl1pPr marL="342900" indent="-342900" algn="l" defTabSz="457200" rtl="0" eaLnBrk="1" latinLnBrk="0" hangingPunct="1">
+      <a:lvl1pPr marL="342891" indent="-342891" algn="l" defTabSz="457189" rtl="0" eaLnBrk="1" latinLnBrk="0" hangingPunct="1">
         <a:spcBef>
           <a:spcPct val="20000"/>
         </a:spcBef>
@@ -2877,7 +2882,7 @@
           <a:cs typeface="+mn-cs"/>
         </a:defRPr>
       </a:lvl1pPr>
-      <a:lvl2pPr marL="742950" indent="-285750" algn="l" defTabSz="457200" rtl="0" eaLnBrk="1" latinLnBrk="0" hangingPunct="1">
+      <a:lvl2pPr marL="742932" indent="-285744" algn="l" defTabSz="457189" rtl="0" eaLnBrk="1" latinLnBrk="0" hangingPunct="1">
         <a:spcBef>
           <a:spcPct val="20000"/>
         </a:spcBef>
@@ -2892,7 +2897,7 @@
           <a:cs typeface="+mn-cs"/>
         </a:defRPr>
       </a:lvl2pPr>
-      <a:lvl3pPr marL="1143000" indent="-228600" algn="l" defTabSz="457200" rtl="0" eaLnBrk="1" latinLnBrk="0" hangingPunct="1">
+      <a:lvl3pPr marL="1142971" indent="-228594" algn="l" defTabSz="457189" rtl="0" eaLnBrk="1" latinLnBrk="0" hangingPunct="1">
         <a:spcBef>
           <a:spcPct val="20000"/>
         </a:spcBef>
@@ -2907,7 +2912,7 @@
           <a:cs typeface="+mn-cs"/>
         </a:defRPr>
       </a:lvl3pPr>
-      <a:lvl4pPr marL="1600200" indent="-228600" algn="l" defTabSz="457200" rtl="0" eaLnBrk="1" latinLnBrk="0" hangingPunct="1">
+      <a:lvl4pPr marL="1600160" indent="-228594" algn="l" defTabSz="457189" rtl="0" eaLnBrk="1" latinLnBrk="0" hangingPunct="1">
         <a:spcBef>
           <a:spcPct val="20000"/>
         </a:spcBef>
@@ -2922,7 +2927,7 @@
           <a:cs typeface="+mn-cs"/>
         </a:defRPr>
       </a:lvl4pPr>
-      <a:lvl5pPr marL="2057400" indent="-228600" algn="l" defTabSz="457200" rtl="0" eaLnBrk="1" latinLnBrk="0" hangingPunct="1">
+      <a:lvl5pPr marL="2057349" indent="-228594" algn="l" defTabSz="457189" rtl="0" eaLnBrk="1" latinLnBrk="0" hangingPunct="1">
         <a:spcBef>
           <a:spcPct val="20000"/>
         </a:spcBef>
@@ -2937,7 +2942,7 @@
           <a:cs typeface="+mn-cs"/>
         </a:defRPr>
       </a:lvl5pPr>
-      <a:lvl6pPr marL="2514600" indent="-228600" algn="l" defTabSz="457200" rtl="0" eaLnBrk="1" latinLnBrk="0" hangingPunct="1">
+      <a:lvl6pPr marL="2514537" indent="-228594" algn="l" defTabSz="457189" rtl="0" eaLnBrk="1" latinLnBrk="0" hangingPunct="1">
         <a:spcBef>
           <a:spcPct val="20000"/>
         </a:spcBef>
@@ -2952,7 +2957,7 @@
           <a:cs typeface="+mn-cs"/>
         </a:defRPr>
       </a:lvl6pPr>
-      <a:lvl7pPr marL="2971800" indent="-228600" algn="l" defTabSz="457200" rtl="0" eaLnBrk="1" latinLnBrk="0" hangingPunct="1">
+      <a:lvl7pPr marL="2971726" indent="-228594" algn="l" defTabSz="457189" rtl="0" eaLnBrk="1" latinLnBrk="0" hangingPunct="1">
         <a:spcBef>
           <a:spcPct val="20000"/>
         </a:spcBef>
@@ -2967,7 +2972,7 @@
           <a:cs typeface="+mn-cs"/>
         </a:defRPr>
       </a:lvl7pPr>
-      <a:lvl8pPr marL="3429000" indent="-228600" algn="l" defTabSz="457200" rtl="0" eaLnBrk="1" latinLnBrk="0" hangingPunct="1">
+      <a:lvl8pPr marL="3428914" indent="-228594" algn="l" defTabSz="457189" rtl="0" eaLnBrk="1" latinLnBrk="0" hangingPunct="1">
         <a:spcBef>
           <a:spcPct val="20000"/>
         </a:spcBef>
@@ -2982,7 +2987,7 @@
           <a:cs typeface="+mn-cs"/>
         </a:defRPr>
       </a:lvl8pPr>
-      <a:lvl9pPr marL="3886200" indent="-228600" algn="l" defTabSz="457200" rtl="0" eaLnBrk="1" latinLnBrk="0" hangingPunct="1">
+      <a:lvl9pPr marL="3886103" indent="-228594" algn="l" defTabSz="457189" rtl="0" eaLnBrk="1" latinLnBrk="0" hangingPunct="1">
         <a:spcBef>
           <a:spcPct val="20000"/>
         </a:spcBef>
@@ -3002,7 +3007,7 @@
       <a:defPPr>
         <a:defRPr lang="en-US"/>
       </a:defPPr>
-      <a:lvl1pPr marL="0" algn="l" defTabSz="457200" rtl="0" eaLnBrk="1" latinLnBrk="0" hangingPunct="1">
+      <a:lvl1pPr marL="0" algn="l" defTabSz="457189" rtl="0" eaLnBrk="1" latinLnBrk="0" hangingPunct="1">
         <a:defRPr sz="1800" kern="1200">
           <a:solidFill>
             <a:schemeClr val="tx1"/>
@@ -3012,7 +3017,7 @@
           <a:cs typeface="+mn-cs"/>
         </a:defRPr>
       </a:lvl1pPr>
-      <a:lvl2pPr marL="457200" algn="l" defTabSz="457200" rtl="0" eaLnBrk="1" latinLnBrk="0" hangingPunct="1">
+      <a:lvl2pPr marL="457189" algn="l" defTabSz="457189" rtl="0" eaLnBrk="1" latinLnBrk="0" hangingPunct="1">
         <a:defRPr sz="1800" kern="1200">
           <a:solidFill>
             <a:schemeClr val="tx1"/>
@@ -3022,7 +3027,7 @@
           <a:cs typeface="+mn-cs"/>
         </a:defRPr>
       </a:lvl2pPr>
-      <a:lvl3pPr marL="914400" algn="l" defTabSz="457200" rtl="0" eaLnBrk="1" latinLnBrk="0" hangingPunct="1">
+      <a:lvl3pPr marL="914377" algn="l" defTabSz="457189" rtl="0" eaLnBrk="1" latinLnBrk="0" hangingPunct="1">
         <a:defRPr sz="1800" kern="1200">
           <a:solidFill>
             <a:schemeClr val="tx1"/>
@@ -3032,7 +3037,7 @@
           <a:cs typeface="+mn-cs"/>
         </a:defRPr>
       </a:lvl3pPr>
-      <a:lvl4pPr marL="1371600" algn="l" defTabSz="457200" rtl="0" eaLnBrk="1" latinLnBrk="0" hangingPunct="1">
+      <a:lvl4pPr marL="1371566" algn="l" defTabSz="457189" rtl="0" eaLnBrk="1" latinLnBrk="0" hangingPunct="1">
         <a:defRPr sz="1800" kern="1200">
           <a:solidFill>
             <a:schemeClr val="tx1"/>
@@ -3042,7 +3047,7 @@
           <a:cs typeface="+mn-cs"/>
         </a:defRPr>
       </a:lvl4pPr>
-      <a:lvl5pPr marL="1828800" algn="l" defTabSz="457200" rtl="0" eaLnBrk="1" latinLnBrk="0" hangingPunct="1">
+      <a:lvl5pPr marL="1828754" algn="l" defTabSz="457189" rtl="0" eaLnBrk="1" latinLnBrk="0" hangingPunct="1">
         <a:defRPr sz="1800" kern="1200">
           <a:solidFill>
             <a:schemeClr val="tx1"/>
@@ -3052,7 +3057,7 @@
           <a:cs typeface="+mn-cs"/>
         </a:defRPr>
       </a:lvl5pPr>
-      <a:lvl6pPr marL="2286000" algn="l" defTabSz="457200" rtl="0" eaLnBrk="1" latinLnBrk="0" hangingPunct="1">
+      <a:lvl6pPr marL="2285943" algn="l" defTabSz="457189" rtl="0" eaLnBrk="1" latinLnBrk="0" hangingPunct="1">
         <a:defRPr sz="1800" kern="1200">
           <a:solidFill>
             <a:schemeClr val="tx1"/>
@@ -3062,7 +3067,7 @@
           <a:cs typeface="+mn-cs"/>
         </a:defRPr>
       </a:lvl6pPr>
-      <a:lvl7pPr marL="2743200" algn="l" defTabSz="457200" rtl="0" eaLnBrk="1" latinLnBrk="0" hangingPunct="1">
+      <a:lvl7pPr marL="2743131" algn="l" defTabSz="457189" rtl="0" eaLnBrk="1" latinLnBrk="0" hangingPunct="1">
         <a:defRPr sz="1800" kern="1200">
           <a:solidFill>
             <a:schemeClr val="tx1"/>
@@ -3072,7 +3077,7 @@
           <a:cs typeface="+mn-cs"/>
         </a:defRPr>
       </a:lvl7pPr>
-      <a:lvl8pPr marL="3200400" algn="l" defTabSz="457200" rtl="0" eaLnBrk="1" latinLnBrk="0" hangingPunct="1">
+      <a:lvl8pPr marL="3200320" algn="l" defTabSz="457189" rtl="0" eaLnBrk="1" latinLnBrk="0" hangingPunct="1">
         <a:defRPr sz="1800" kern="1200">
           <a:solidFill>
             <a:schemeClr val="tx1"/>
@@ -3082,7 +3087,7 @@
           <a:cs typeface="+mn-cs"/>
         </a:defRPr>
       </a:lvl8pPr>
-      <a:lvl9pPr marL="3657600" algn="l" defTabSz="457200" rtl="0" eaLnBrk="1" latinLnBrk="0" hangingPunct="1">
+      <a:lvl9pPr marL="3657509" algn="l" defTabSz="457189" rtl="0" eaLnBrk="1" latinLnBrk="0" hangingPunct="1">
         <a:defRPr sz="1800" kern="1200">
           <a:solidFill>
             <a:schemeClr val="tx1"/>
@@ -3098,7 +3103,7 @@
 </file>
 
 <file path=ppt/slides/slide1.xml><?xml version="1.0" encoding="utf-8"?>
-<p:sld xmlns:a="http://schemas.openxmlformats.org/drawingml/2006/main" xmlns:p="http://schemas.openxmlformats.org/presentationml/2006/main" xmlns:r="http://schemas.openxmlformats.org/officeDocument/2006/relationships">
+<p:sld xmlns:a="http://schemas.openxmlformats.org/drawingml/2006/main" xmlns:r="http://schemas.openxmlformats.org/officeDocument/2006/relationships" xmlns:p="http://schemas.openxmlformats.org/presentationml/2006/main">
   <p:cSld>
     <p:spTree>
       <p:nvGrpSpPr>
@@ -3106,7 +3111,14 @@
         <p:cNvGrpSpPr/>
         <p:nvPr/>
       </p:nvGrpSpPr>
-      <p:grpSpPr/>
+      <p:grpSpPr>
+        <a:xfrm>
+          <a:off x="0" y="0"/>
+          <a:ext cx="0" cy="0"/>
+          <a:chOff x="0" y="0"/>
+          <a:chExt cx="0" cy="0"/>
+        </a:xfrm>
+      </p:grpSpPr>
       <p:sp>
         <p:nvSpPr>
           <p:cNvPr id="2" name="Title 1"/>
@@ -3117,14 +3129,33 @@
             <p:ph type="ctrTitle"/>
           </p:nvPr>
         </p:nvSpPr>
-        <p:spPr/>
-        <p:txBody>
-          <a:bodyPr/>
-          <a:lstStyle/>
-          <a:p>
-            <a:r>
-              <a:t>Linux Shell Script 문법과 예제</a:t>
-            </a:r>
+        <p:spPr>
+          <a:xfrm>
+            <a:off x="2133600" y="1219200"/>
+            <a:ext cx="7772400" cy="1470025"/>
+          </a:xfrm>
+        </p:spPr>
+        <p:txBody>
+          <a:bodyPr/>
+          <a:lstStyle/>
+          <a:p>
+            <a:r>
+              <a:rPr lang="en-US" dirty="0"/>
+              <a:t>Linux Shell Script </a:t>
+            </a:r>
+            <a:r>
+              <a:rPr lang="ko-KR" altLang="en-US" dirty="0" err="1"/>
+              <a:t>문법과</a:t>
+            </a:r>
+            <a:r>
+              <a:rPr lang="ko-KR" altLang="en-US" dirty="0"/>
+              <a:t> </a:t>
+            </a:r>
+            <a:r>
+              <a:rPr lang="ko-KR" altLang="en-US" dirty="0" err="1"/>
+              <a:t>예제</a:t>
+            </a:r>
+            <a:endParaRPr lang="ko-KR" altLang="en-US" dirty="0"/>
           </a:p>
         </p:txBody>
       </p:sp>
@@ -3138,13 +3169,39 @@
             <p:ph type="subTitle" idx="1"/>
           </p:nvPr>
         </p:nvSpPr>
-        <p:spPr/>
-        <p:txBody>
-          <a:bodyPr/>
-          <a:lstStyle/>
-          <a:p>
-            <a:r>
-              <a:t>Bash 중심의 기초 문법 · 파일 처리 · 자동화 실습</a:t>
+        <p:spPr>
+          <a:xfrm>
+            <a:off x="2895600" y="3292476"/>
+            <a:ext cx="6400800" cy="1752600"/>
+          </a:xfrm>
+        </p:spPr>
+        <p:txBody>
+          <a:bodyPr/>
+          <a:lstStyle/>
+          <a:p>
+            <a:r>
+              <a:rPr lang="en-US" altLang="ko-KR"/>
+              <a:t>Bash </a:t>
+            </a:r>
+            <a:r>
+              <a:rPr lang="ko-KR" altLang="en-US"/>
+              <a:t>중심의 기초 문법 </a:t>
+            </a:r>
+            <a:r>
+              <a:rPr lang="en-US" altLang="ko-KR"/>
+              <a:t>· </a:t>
+            </a:r>
+            <a:r>
+              <a:rPr lang="ko-KR" altLang="en-US"/>
+              <a:t>파일 처리 </a:t>
+            </a:r>
+            <a:r>
+              <a:rPr lang="en-US" altLang="ko-KR"/>
+              <a:t>· </a:t>
+            </a:r>
+            <a:r>
+              <a:rPr lang="ko-KR" altLang="en-US"/>
+              <a:t>자동화 실습</a:t>
             </a:r>
           </a:p>
         </p:txBody>
@@ -3158,7 +3215,7 @@
 </file>
 
 <file path=ppt/slides/slide10.xml><?xml version="1.0" encoding="utf-8"?>
-<p:sld xmlns:a="http://schemas.openxmlformats.org/drawingml/2006/main" xmlns:p="http://schemas.openxmlformats.org/presentationml/2006/main" xmlns:r="http://schemas.openxmlformats.org/officeDocument/2006/relationships">
+<p:sld xmlns:a="http://schemas.openxmlformats.org/drawingml/2006/main" xmlns:r="http://schemas.openxmlformats.org/officeDocument/2006/relationships" xmlns:p="http://schemas.openxmlformats.org/presentationml/2006/main">
   <p:cSld>
     <p:spTree>
       <p:nvGrpSpPr>
@@ -3166,7 +3223,14 @@
         <p:cNvGrpSpPr/>
         <p:nvPr/>
       </p:nvGrpSpPr>
-      <p:grpSpPr/>
+      <p:grpSpPr>
+        <a:xfrm>
+          <a:off x="0" y="0"/>
+          <a:ext cx="0" cy="0"/>
+          <a:chOff x="0" y="0"/>
+          <a:chExt cx="0" cy="0"/>
+        </a:xfrm>
+      </p:grpSpPr>
       <p:sp>
         <p:nvSpPr>
           <p:cNvPr id="2" name="Title 1"/>
@@ -3197,7 +3261,7 @@
         <p:spPr>
           <a:xfrm>
             <a:off x="640080" y="1280160"/>
-            <a:ext cx="10881360" cy="5029200"/>
+            <a:ext cx="10881360" cy="1364476"/>
           </a:xfrm>
           <a:prstGeom prst="rect">
             <a:avLst/>
@@ -3217,6 +3281,7 @@
               <a:defRPr sz="2200"/>
             </a:pPr>
             <a:r>
+              <a:rPr sz="2200"/>
               <a:t>반복되는 작업을 함수로 묶어 재사용</a:t>
             </a:r>
           </a:p>
@@ -3228,6 +3293,7 @@
               <a:defRPr sz="2200"/>
             </a:pPr>
             <a:r>
+              <a:rPr sz="2200"/>
               <a:t>$1, $2 등으로 함수 인자를 전달</a:t>
             </a:r>
           </a:p>
@@ -3239,6 +3305,7 @@
               <a:defRPr sz="2200"/>
             </a:pPr>
             <a:r>
+              <a:rPr sz="2200"/>
               <a:t>return 0 : 성공, 0이 아닌 값 : 실패</a:t>
             </a:r>
           </a:p>
@@ -3252,8 +3319,8 @@
         </p:nvSpPr>
         <p:spPr>
           <a:xfrm>
-            <a:off x="822960" y="4389120"/>
-            <a:ext cx="10424160" cy="1645920"/>
+            <a:off x="822961" y="4389121"/>
+            <a:ext cx="1866217" cy="1169551"/>
           </a:xfrm>
           <a:prstGeom prst="rect">
             <a:avLst/>
@@ -3272,6 +3339,7 @@
               </a:defRPr>
             </a:pPr>
             <a:r>
+              <a:rPr sz="1600"/>
               <a:t>hello() {</a:t>
             </a:r>
           </a:p>
@@ -3301,7 +3369,7 @@
 </file>
 
 <file path=ppt/slides/slide11.xml><?xml version="1.0" encoding="utf-8"?>
-<p:sld xmlns:a="http://schemas.openxmlformats.org/drawingml/2006/main" xmlns:p="http://schemas.openxmlformats.org/presentationml/2006/main" xmlns:r="http://schemas.openxmlformats.org/officeDocument/2006/relationships">
+<p:sld xmlns:a="http://schemas.openxmlformats.org/drawingml/2006/main" xmlns:r="http://schemas.openxmlformats.org/officeDocument/2006/relationships" xmlns:p="http://schemas.openxmlformats.org/presentationml/2006/main">
   <p:cSld>
     <p:spTree>
       <p:nvGrpSpPr>
@@ -3309,7 +3377,14 @@
         <p:cNvGrpSpPr/>
         <p:nvPr/>
       </p:nvGrpSpPr>
-      <p:grpSpPr/>
+      <p:grpSpPr>
+        <a:xfrm>
+          <a:off x="0" y="0"/>
+          <a:ext cx="0" cy="0"/>
+          <a:chOff x="0" y="0"/>
+          <a:chExt cx="0" cy="0"/>
+        </a:xfrm>
+      </p:grpSpPr>
       <p:sp>
         <p:nvSpPr>
           <p:cNvPr id="2" name="Title 1"/>
@@ -3339,8 +3414,8 @@
         </p:nvSpPr>
         <p:spPr>
           <a:xfrm>
-            <a:off x="640080" y="1280160"/>
-            <a:ext cx="10881360" cy="5029200"/>
+            <a:off x="640080" y="1280161"/>
+            <a:ext cx="10881360" cy="2298065"/>
           </a:xfrm>
           <a:prstGeom prst="rect">
             <a:avLst/>
@@ -3360,6 +3435,7 @@
               <a:defRPr sz="2200"/>
             </a:pPr>
             <a:r>
+              <a:rPr sz="2200"/>
               <a:t>$0 : 스크립트 이름</a:t>
             </a:r>
           </a:p>
@@ -3371,6 +3447,7 @@
               <a:defRPr sz="2200"/>
             </a:pPr>
             <a:r>
+              <a:rPr sz="2200"/>
               <a:t>$1, $2 : 첫 번째, 두 번째 인자</a:t>
             </a:r>
           </a:p>
@@ -3382,6 +3459,7 @@
               <a:defRPr sz="2200"/>
             </a:pPr>
             <a:r>
+              <a:rPr sz="2200"/>
               <a:t>$# : 인자 개수</a:t>
             </a:r>
           </a:p>
@@ -3393,6 +3471,7 @@
               <a:defRPr sz="2200"/>
             </a:pPr>
             <a:r>
+              <a:rPr sz="2200"/>
               <a:t>$@ : 모든 인자</a:t>
             </a:r>
           </a:p>
@@ -3404,6 +3483,7 @@
               <a:defRPr sz="2200"/>
             </a:pPr>
             <a:r>
+              <a:rPr sz="2200"/>
               <a:t>$? : 직전 명령의 종료 코드</a:t>
             </a:r>
           </a:p>
@@ -3417,8 +3497,8 @@
         </p:nvSpPr>
         <p:spPr>
           <a:xfrm>
-            <a:off x="822960" y="4389120"/>
-            <a:ext cx="10424160" cy="1645920"/>
+            <a:off x="822960" y="4389122"/>
+            <a:ext cx="2541080" cy="338554"/>
           </a:xfrm>
           <a:prstGeom prst="rect">
             <a:avLst/>
@@ -3437,6 +3517,7 @@
               </a:defRPr>
             </a:pPr>
             <a:r>
+              <a:rPr sz="1600"/>
               <a:t>./test.sh hello world</a:t>
             </a:r>
           </a:p>
@@ -3451,7 +3532,7 @@
 </file>
 
 <file path=ppt/slides/slide12.xml><?xml version="1.0" encoding="utf-8"?>
-<p:sld xmlns:a="http://schemas.openxmlformats.org/drawingml/2006/main" xmlns:p="http://schemas.openxmlformats.org/presentationml/2006/main" xmlns:r="http://schemas.openxmlformats.org/officeDocument/2006/relationships">
+<p:sld xmlns:a="http://schemas.openxmlformats.org/drawingml/2006/main" xmlns:r="http://schemas.openxmlformats.org/officeDocument/2006/relationships" xmlns:p="http://schemas.openxmlformats.org/presentationml/2006/main">
   <p:cSld>
     <p:spTree>
       <p:nvGrpSpPr>
@@ -3459,7 +3540,14 @@
         <p:cNvGrpSpPr/>
         <p:nvPr/>
       </p:nvGrpSpPr>
-      <p:grpSpPr/>
+      <p:grpSpPr>
+        <a:xfrm>
+          <a:off x="0" y="0"/>
+          <a:ext cx="0" cy="0"/>
+          <a:chOff x="0" y="0"/>
+          <a:chExt cx="0" cy="0"/>
+        </a:xfrm>
+      </p:grpSpPr>
       <p:sp>
         <p:nvSpPr>
           <p:cNvPr id="2" name="Title 1"/>
@@ -3489,8 +3577,8 @@
         </p:nvSpPr>
         <p:spPr>
           <a:xfrm>
-            <a:off x="640080" y="1280160"/>
-            <a:ext cx="10881360" cy="5029200"/>
+            <a:off x="640080" y="1280161"/>
+            <a:ext cx="10881360" cy="1831271"/>
           </a:xfrm>
           <a:prstGeom prst="rect">
             <a:avLst/>
@@ -3510,6 +3598,7 @@
               <a:defRPr sz="2200"/>
             </a:pPr>
             <a:r>
+              <a:rPr sz="2200"/>
               <a:t>&gt; : 파일 덮어쓰기</a:t>
             </a:r>
           </a:p>
@@ -3521,6 +3610,7 @@
               <a:defRPr sz="2200"/>
             </a:pPr>
             <a:r>
+              <a:rPr sz="2200"/>
               <a:t>&gt;&gt; : 파일 뒤에 추가</a:t>
             </a:r>
           </a:p>
@@ -3532,6 +3622,7 @@
               <a:defRPr sz="2200"/>
             </a:pPr>
             <a:r>
+              <a:rPr sz="2200"/>
               <a:t>2&gt; : 표준 오류를 파일로 저장</a:t>
             </a:r>
           </a:p>
@@ -3543,6 +3634,7 @@
               <a:defRPr sz="2200"/>
             </a:pPr>
             <a:r>
+              <a:rPr sz="2200"/>
               <a:t>| : 앞 명령의 출력을 다음 명령으로 전달</a:t>
             </a:r>
           </a:p>
@@ -3556,8 +3648,8 @@
         </p:nvSpPr>
         <p:spPr>
           <a:xfrm>
-            <a:off x="822960" y="4389120"/>
-            <a:ext cx="10424160" cy="1645920"/>
+            <a:off x="822960" y="4389122"/>
+            <a:ext cx="4560864" cy="338554"/>
           </a:xfrm>
           <a:prstGeom prst="rect">
             <a:avLst/>
@@ -3576,6 +3668,7 @@
               </a:defRPr>
             </a:pPr>
             <a:r>
+              <a:rPr sz="1600"/>
               <a:t>grep "ERROR" app.log | awk '{print $1}'</a:t>
             </a:r>
           </a:p>
@@ -3590,7 +3683,7 @@
 </file>
 
 <file path=ppt/slides/slide13.xml><?xml version="1.0" encoding="utf-8"?>
-<p:sld xmlns:a="http://schemas.openxmlformats.org/drawingml/2006/main" xmlns:p="http://schemas.openxmlformats.org/presentationml/2006/main" xmlns:r="http://schemas.openxmlformats.org/officeDocument/2006/relationships">
+<p:sld xmlns:a="http://schemas.openxmlformats.org/drawingml/2006/main" xmlns:r="http://schemas.openxmlformats.org/officeDocument/2006/relationships" xmlns:p="http://schemas.openxmlformats.org/presentationml/2006/main">
   <p:cSld>
     <p:spTree>
       <p:nvGrpSpPr>
@@ -3598,7 +3691,14 @@
         <p:cNvGrpSpPr/>
         <p:nvPr/>
       </p:nvGrpSpPr>
-      <p:grpSpPr/>
+      <p:grpSpPr>
+        <a:xfrm>
+          <a:off x="0" y="0"/>
+          <a:ext cx="0" cy="0"/>
+          <a:chOff x="0" y="0"/>
+          <a:chExt cx="0" cy="0"/>
+        </a:xfrm>
+      </p:grpSpPr>
       <p:sp>
         <p:nvSpPr>
           <p:cNvPr id="2" name="Title 1"/>
@@ -3628,8 +3728,8 @@
         </p:nvSpPr>
         <p:spPr>
           <a:xfrm>
-            <a:off x="640080" y="1280160"/>
-            <a:ext cx="10881360" cy="5029200"/>
+            <a:off x="640080" y="1280161"/>
+            <a:ext cx="10881360" cy="2298065"/>
           </a:xfrm>
           <a:prstGeom prst="rect">
             <a:avLst/>
@@ -3649,6 +3749,7 @@
               <a:defRPr sz="2200"/>
             </a:pPr>
             <a:r>
+              <a:rPr sz="2200"/>
               <a:t>grep : 문자열 검색</a:t>
             </a:r>
           </a:p>
@@ -3660,6 +3761,7 @@
               <a:defRPr sz="2200"/>
             </a:pPr>
             <a:r>
+              <a:rPr sz="2200"/>
               <a:t>awk : 컬럼·텍스트 데이터 처리</a:t>
             </a:r>
           </a:p>
@@ -3671,6 +3773,7 @@
               <a:defRPr sz="2200"/>
             </a:pPr>
             <a:r>
+              <a:rPr sz="2200"/>
               <a:t>sed : 문자열 치환·텍스트 수정</a:t>
             </a:r>
           </a:p>
@@ -3682,6 +3785,7 @@
               <a:defRPr sz="2200"/>
             </a:pPr>
             <a:r>
+              <a:rPr sz="2200"/>
               <a:t>find : 파일·디렉터리 검색</a:t>
             </a:r>
           </a:p>
@@ -3693,6 +3797,7 @@
               <a:defRPr sz="2200"/>
             </a:pPr>
             <a:r>
+              <a:rPr sz="2200"/>
               <a:t>쉘 실무 자동화의 핵심 명령어</a:t>
             </a:r>
           </a:p>
@@ -3707,7 +3812,7 @@
         <p:spPr>
           <a:xfrm>
             <a:off x="822960" y="4389120"/>
-            <a:ext cx="10424160" cy="1645920"/>
+            <a:ext cx="2934458" cy="892552"/>
           </a:xfrm>
           <a:prstGeom prst="rect">
             <a:avLst/>
@@ -3726,6 +3831,7 @@
               </a:defRPr>
             </a:pPr>
             <a:r>
+              <a:rPr sz="1600"/>
               <a:t>grep "ERROR" app.log</a:t>
             </a:r>
           </a:p>
@@ -3750,7 +3856,7 @@
 </file>
 
 <file path=ppt/slides/slide14.xml><?xml version="1.0" encoding="utf-8"?>
-<p:sld xmlns:a="http://schemas.openxmlformats.org/drawingml/2006/main" xmlns:p="http://schemas.openxmlformats.org/presentationml/2006/main" xmlns:r="http://schemas.openxmlformats.org/officeDocument/2006/relationships">
+<p:sld xmlns:a="http://schemas.openxmlformats.org/drawingml/2006/main" xmlns:r="http://schemas.openxmlformats.org/officeDocument/2006/relationships" xmlns:p="http://schemas.openxmlformats.org/presentationml/2006/main">
   <p:cSld>
     <p:spTree>
       <p:nvGrpSpPr>
@@ -3758,7 +3864,14 @@
         <p:cNvGrpSpPr/>
         <p:nvPr/>
       </p:nvGrpSpPr>
-      <p:grpSpPr/>
+      <p:grpSpPr>
+        <a:xfrm>
+          <a:off x="0" y="0"/>
+          <a:ext cx="0" cy="0"/>
+          <a:chOff x="0" y="0"/>
+          <a:chExt cx="0" cy="0"/>
+        </a:xfrm>
+      </p:grpSpPr>
       <p:sp>
         <p:nvSpPr>
           <p:cNvPr id="2" name="Title 1"/>
@@ -3789,7 +3902,7 @@
         <p:spPr>
           <a:xfrm>
             <a:off x="640080" y="1280160"/>
-            <a:ext cx="10881360" cy="5029200"/>
+            <a:ext cx="10881360" cy="1364476"/>
           </a:xfrm>
           <a:prstGeom prst="rect">
             <a:avLst/>
@@ -3809,6 +3922,7 @@
               <a:defRPr sz="2200"/>
             </a:pPr>
             <a:r>
+              <a:rPr sz="2200"/>
               <a:t>while read 패턴으로 파일의 각 줄을 순차 처리</a:t>
             </a:r>
           </a:p>
@@ -3820,6 +3934,7 @@
               <a:defRPr sz="2200"/>
             </a:pPr>
             <a:r>
+              <a:rPr sz="2200"/>
               <a:t>서버 목록, CSV 유사 텍스트, 로그 처리 등에 활용</a:t>
             </a:r>
           </a:p>
@@ -3831,6 +3946,7 @@
               <a:defRPr sz="2200"/>
             </a:pPr>
             <a:r>
+              <a:rPr sz="2200"/>
               <a:t>IFS= read -r 사용으로 공백·백슬래시 처리 안정성 향상</a:t>
             </a:r>
           </a:p>
@@ -3844,8 +3960,8 @@
         </p:nvSpPr>
         <p:spPr>
           <a:xfrm>
-            <a:off x="822960" y="4389120"/>
-            <a:ext cx="10424160" cy="1645920"/>
+            <a:off x="822961" y="4389120"/>
+            <a:ext cx="3214341" cy="892552"/>
           </a:xfrm>
           <a:prstGeom prst="rect">
             <a:avLst/>
@@ -3864,6 +3980,7 @@
               </a:defRPr>
             </a:pPr>
             <a:r>
+              <a:rPr sz="1600"/>
               <a:t>while IFS= read -r line; do</a:t>
             </a:r>
           </a:p>
@@ -3888,7 +4005,7 @@
 </file>
 
 <file path=ppt/slides/slide15.xml><?xml version="1.0" encoding="utf-8"?>
-<p:sld xmlns:a="http://schemas.openxmlformats.org/drawingml/2006/main" xmlns:p="http://schemas.openxmlformats.org/presentationml/2006/main" xmlns:r="http://schemas.openxmlformats.org/officeDocument/2006/relationships">
+<p:sld xmlns:a="http://schemas.openxmlformats.org/drawingml/2006/main" xmlns:r="http://schemas.openxmlformats.org/officeDocument/2006/relationships" xmlns:p="http://schemas.openxmlformats.org/presentationml/2006/main">
   <p:cSld>
     <p:spTree>
       <p:nvGrpSpPr>
@@ -3896,7 +4013,14 @@
         <p:cNvGrpSpPr/>
         <p:nvPr/>
       </p:nvGrpSpPr>
-      <p:grpSpPr/>
+      <p:grpSpPr>
+        <a:xfrm>
+          <a:off x="0" y="0"/>
+          <a:ext cx="0" cy="0"/>
+          <a:chOff x="0" y="0"/>
+          <a:chExt cx="0" cy="0"/>
+        </a:xfrm>
+      </p:grpSpPr>
       <p:sp>
         <p:nvSpPr>
           <p:cNvPr id="2" name="Title 1"/>
@@ -3926,8 +4050,8 @@
         </p:nvSpPr>
         <p:spPr>
           <a:xfrm>
-            <a:off x="640080" y="1280160"/>
-            <a:ext cx="10881360" cy="5029200"/>
+            <a:off x="640080" y="1280161"/>
+            <a:ext cx="10881360" cy="2298065"/>
           </a:xfrm>
           <a:prstGeom prst="rect">
             <a:avLst/>
@@ -3947,6 +4071,7 @@
               <a:defRPr sz="2200"/>
             </a:pPr>
             <a:r>
+              <a:rPr sz="2200"/>
               <a:t>$HOME : 사용자 홈 디렉터리</a:t>
             </a:r>
           </a:p>
@@ -3958,6 +4083,7 @@
               <a:defRPr sz="2200"/>
             </a:pPr>
             <a:r>
+              <a:rPr sz="2200"/>
               <a:t>$USER : 현재 사용자</a:t>
             </a:r>
           </a:p>
@@ -3969,6 +4095,7 @@
               <a:defRPr sz="2200"/>
             </a:pPr>
             <a:r>
+              <a:rPr sz="2200"/>
               <a:t>$PATH : 실행 파일 검색 경로</a:t>
             </a:r>
           </a:p>
@@ -3980,6 +4107,7 @@
               <a:defRPr sz="2200"/>
             </a:pPr>
             <a:r>
+              <a:rPr sz="2200"/>
               <a:t>$PWD : 현재 디렉터리</a:t>
             </a:r>
           </a:p>
@@ -3991,6 +4119,7 @@
               <a:defRPr sz="2200"/>
             </a:pPr>
             <a:r>
+              <a:rPr sz="2200"/>
               <a:t>export : 자식 프로세스에도 전달할 환경 변수 설정</a:t>
             </a:r>
           </a:p>
@@ -4004,8 +4133,8 @@
         </p:nvSpPr>
         <p:spPr>
           <a:xfrm>
-            <a:off x="822960" y="4389120"/>
-            <a:ext cx="10424160" cy="1645920"/>
+            <a:off x="822961" y="4389121"/>
+            <a:ext cx="3102131" cy="615553"/>
           </a:xfrm>
           <a:prstGeom prst="rect">
             <a:avLst/>
@@ -4024,6 +4153,7 @@
               </a:defRPr>
             </a:pPr>
             <a:r>
+              <a:rPr sz="1600"/>
               <a:t>export APP_HOME=/opt/myapp</a:t>
             </a:r>
           </a:p>
@@ -4043,7 +4173,7 @@
 </file>
 
 <file path=ppt/slides/slide16.xml><?xml version="1.0" encoding="utf-8"?>
-<p:sld xmlns:a="http://schemas.openxmlformats.org/drawingml/2006/main" xmlns:p="http://schemas.openxmlformats.org/presentationml/2006/main" xmlns:r="http://schemas.openxmlformats.org/officeDocument/2006/relationships">
+<p:sld xmlns:a="http://schemas.openxmlformats.org/drawingml/2006/main" xmlns:r="http://schemas.openxmlformats.org/officeDocument/2006/relationships" xmlns:p="http://schemas.openxmlformats.org/presentationml/2006/main">
   <p:cSld>
     <p:spTree>
       <p:nvGrpSpPr>
@@ -4051,7 +4181,14 @@
         <p:cNvGrpSpPr/>
         <p:nvPr/>
       </p:nvGrpSpPr>
-      <p:grpSpPr/>
+      <p:grpSpPr>
+        <a:xfrm>
+          <a:off x="0" y="0"/>
+          <a:ext cx="0" cy="0"/>
+          <a:chOff x="0" y="0"/>
+          <a:chExt cx="0" cy="0"/>
+        </a:xfrm>
+      </p:grpSpPr>
       <p:sp>
         <p:nvSpPr>
           <p:cNvPr id="2" name="Title 1"/>
@@ -4081,8 +4218,8 @@
         </p:nvSpPr>
         <p:spPr>
           <a:xfrm>
-            <a:off x="640080" y="1280160"/>
-            <a:ext cx="10881360" cy="5029200"/>
+            <a:off x="640080" y="1280161"/>
+            <a:ext cx="10881360" cy="1831271"/>
           </a:xfrm>
           <a:prstGeom prst="rect">
             <a:avLst/>
@@ -4102,6 +4239,7 @@
               <a:defRPr sz="2200"/>
             </a:pPr>
             <a:r>
+              <a:rPr sz="2200"/>
               <a:t>bash -x script.sh : 실행 과정을 확인</a:t>
             </a:r>
           </a:p>
@@ -4113,6 +4251,7 @@
               <a:defRPr sz="2200"/>
             </a:pPr>
             <a:r>
+              <a:rPr sz="2200"/>
               <a:t>set -e : 명령 실패 시 종료</a:t>
             </a:r>
           </a:p>
@@ -4124,6 +4263,7 @@
               <a:defRPr sz="2200"/>
             </a:pPr>
             <a:r>
+              <a:rPr sz="2200"/>
               <a:t>set -u : 정의되지 않은 변수 사용 시 오류</a:t>
             </a:r>
           </a:p>
@@ -4135,6 +4275,7 @@
               <a:defRPr sz="2200"/>
             </a:pPr>
             <a:r>
+              <a:rPr sz="2200"/>
               <a:t>set -o pipefail : 파이프라인 실패 감지</a:t>
             </a:r>
           </a:p>
@@ -4148,8 +4289,8 @@
         </p:nvSpPr>
         <p:spPr>
           <a:xfrm>
-            <a:off x="822960" y="4389120"/>
-            <a:ext cx="10424160" cy="1645920"/>
+            <a:off x="822961" y="4389121"/>
+            <a:ext cx="1693349" cy="615553"/>
           </a:xfrm>
           <a:prstGeom prst="rect">
             <a:avLst/>
@@ -4168,6 +4309,7 @@
               </a:defRPr>
             </a:pPr>
             <a:r>
+              <a:rPr sz="1600"/>
               <a:t>#!/bin/bash</a:t>
             </a:r>
           </a:p>
@@ -4187,7 +4329,7 @@
 </file>
 
 <file path=ppt/slides/slide17.xml><?xml version="1.0" encoding="utf-8"?>
-<p:sld xmlns:a="http://schemas.openxmlformats.org/drawingml/2006/main" xmlns:p="http://schemas.openxmlformats.org/presentationml/2006/main" xmlns:r="http://schemas.openxmlformats.org/officeDocument/2006/relationships">
+<p:sld xmlns:a="http://schemas.openxmlformats.org/drawingml/2006/main" xmlns:r="http://schemas.openxmlformats.org/officeDocument/2006/relationships" xmlns:p="http://schemas.openxmlformats.org/presentationml/2006/main">
   <p:cSld>
     <p:spTree>
       <p:nvGrpSpPr>
@@ -4195,7 +4337,14 @@
         <p:cNvGrpSpPr/>
         <p:nvPr/>
       </p:nvGrpSpPr>
-      <p:grpSpPr/>
+      <p:grpSpPr>
+        <a:xfrm>
+          <a:off x="0" y="0"/>
+          <a:ext cx="0" cy="0"/>
+          <a:chOff x="0" y="0"/>
+          <a:chExt cx="0" cy="0"/>
+        </a:xfrm>
+      </p:grpSpPr>
       <p:sp>
         <p:nvSpPr>
           <p:cNvPr id="2" name="Title 1"/>
@@ -4226,7 +4375,7 @@
         <p:spPr>
           <a:xfrm>
             <a:off x="640080" y="1280160"/>
-            <a:ext cx="10881360" cy="5029200"/>
+            <a:ext cx="10881360" cy="1364476"/>
           </a:xfrm>
           <a:prstGeom prst="rect">
             <a:avLst/>
@@ -4246,6 +4395,7 @@
               <a:defRPr sz="2200"/>
             </a:pPr>
             <a:r>
+              <a:rPr sz="2200"/>
               <a:t>특정 디렉터리의 로그 파일을 자동으로 순회</a:t>
             </a:r>
           </a:p>
@@ -4257,6 +4407,7 @@
               <a:defRPr sz="2200"/>
             </a:pPr>
             <a:r>
+              <a:rPr sz="2200"/>
               <a:t>파일인지 확인 후 gzip으로 압축</a:t>
             </a:r>
           </a:p>
@@ -4268,6 +4419,7 @@
               <a:defRPr sz="2200"/>
             </a:pPr>
             <a:r>
+              <a:rPr sz="2200"/>
               <a:t>운영 서버의 반복 작업 자동화에 활용</a:t>
             </a:r>
           </a:p>
@@ -4281,8 +4433,8 @@
         </p:nvSpPr>
         <p:spPr>
           <a:xfrm>
-            <a:off x="822960" y="4389120"/>
-            <a:ext cx="10424160" cy="1645920"/>
+            <a:off x="822961" y="4389120"/>
+            <a:ext cx="4224233" cy="892552"/>
           </a:xfrm>
           <a:prstGeom prst="rect">
             <a:avLst/>
@@ -4301,6 +4453,7 @@
               </a:defRPr>
             </a:pPr>
             <a:r>
+              <a:rPr sz="1600"/>
               <a:t>for file in /var/log/myapp/*.log; do</a:t>
             </a:r>
           </a:p>
@@ -4325,7 +4478,7 @@
 </file>
 
 <file path=ppt/slides/slide18.xml><?xml version="1.0" encoding="utf-8"?>
-<p:sld xmlns:a="http://schemas.openxmlformats.org/drawingml/2006/main" xmlns:p="http://schemas.openxmlformats.org/presentationml/2006/main" xmlns:r="http://schemas.openxmlformats.org/officeDocument/2006/relationships">
+<p:sld xmlns:a="http://schemas.openxmlformats.org/drawingml/2006/main" xmlns:r="http://schemas.openxmlformats.org/officeDocument/2006/relationships" xmlns:p="http://schemas.openxmlformats.org/presentationml/2006/main">
   <p:cSld>
     <p:spTree>
       <p:nvGrpSpPr>
@@ -4333,7 +4486,14 @@
         <p:cNvGrpSpPr/>
         <p:nvPr/>
       </p:nvGrpSpPr>
-      <p:grpSpPr/>
+      <p:grpSpPr>
+        <a:xfrm>
+          <a:off x="0" y="0"/>
+          <a:ext cx="0" cy="0"/>
+          <a:chOff x="0" y="0"/>
+          <a:chExt cx="0" cy="0"/>
+        </a:xfrm>
+      </p:grpSpPr>
       <p:sp>
         <p:nvSpPr>
           <p:cNvPr id="2" name="Title 1"/>
@@ -4364,7 +4524,7 @@
         <p:spPr>
           <a:xfrm>
             <a:off x="640080" y="1280160"/>
-            <a:ext cx="10881360" cy="5029200"/>
+            <a:ext cx="10881360" cy="1364476"/>
           </a:xfrm>
           <a:prstGeom prst="rect">
             <a:avLst/>
@@ -4384,6 +4544,7 @@
               <a:defRPr sz="2200"/>
             </a:pPr>
             <a:r>
+              <a:rPr sz="2200"/>
               <a:t>날짜·시간을 파일명에 포함하면 백업 이력 관리가 편리</a:t>
             </a:r>
           </a:p>
@@ -4395,6 +4556,7 @@
               <a:defRPr sz="2200"/>
             </a:pPr>
             <a:r>
+              <a:rPr sz="2200"/>
               <a:t>tar + gzip 조합으로 디렉터리 백업</a:t>
             </a:r>
           </a:p>
@@ -4406,6 +4568,7 @@
               <a:defRPr sz="2200"/>
             </a:pPr>
             <a:r>
+              <a:rPr sz="2200"/>
               <a:t>실패 여부는 종료 코드로 확인</a:t>
             </a:r>
           </a:p>
@@ -4419,8 +4582,8 @@
         </p:nvSpPr>
         <p:spPr>
           <a:xfrm>
-            <a:off x="822960" y="4389120"/>
-            <a:ext cx="10424160" cy="1645920"/>
+            <a:off x="822960" y="4389121"/>
+            <a:ext cx="5294078" cy="615553"/>
           </a:xfrm>
           <a:prstGeom prst="rect">
             <a:avLst/>
@@ -4439,6 +4602,7 @@
               </a:defRPr>
             </a:pPr>
             <a:r>
+              <a:rPr sz="1600"/>
               <a:t>DATE=$(date +%Y%m%d_%H%M%S)</a:t>
             </a:r>
           </a:p>
@@ -4458,7 +4622,7 @@
 </file>
 
 <file path=ppt/slides/slide19.xml><?xml version="1.0" encoding="utf-8"?>
-<p:sld xmlns:a="http://schemas.openxmlformats.org/drawingml/2006/main" xmlns:p="http://schemas.openxmlformats.org/presentationml/2006/main" xmlns:r="http://schemas.openxmlformats.org/officeDocument/2006/relationships">
+<p:sld xmlns:a="http://schemas.openxmlformats.org/drawingml/2006/main" xmlns:r="http://schemas.openxmlformats.org/officeDocument/2006/relationships" xmlns:p="http://schemas.openxmlformats.org/presentationml/2006/main">
   <p:cSld>
     <p:spTree>
       <p:nvGrpSpPr>
@@ -4466,7 +4630,14 @@
         <p:cNvGrpSpPr/>
         <p:nvPr/>
       </p:nvGrpSpPr>
-      <p:grpSpPr/>
+      <p:grpSpPr>
+        <a:xfrm>
+          <a:off x="0" y="0"/>
+          <a:ext cx="0" cy="0"/>
+          <a:chOff x="0" y="0"/>
+          <a:chExt cx="0" cy="0"/>
+        </a:xfrm>
+      </p:grpSpPr>
       <p:sp>
         <p:nvSpPr>
           <p:cNvPr id="2" name="Title 1"/>
@@ -4496,8 +4667,8 @@
         </p:nvSpPr>
         <p:spPr>
           <a:xfrm>
-            <a:off x="640080" y="1280160"/>
-            <a:ext cx="10881360" cy="5029200"/>
+            <a:off x="640080" y="1280161"/>
+            <a:ext cx="10881360" cy="2298065"/>
           </a:xfrm>
           <a:prstGeom prst="rect">
             <a:avLst/>
@@ -4517,6 +4688,7 @@
               <a:defRPr sz="2200"/>
             </a:pPr>
             <a:r>
+              <a:rPr sz="2200"/>
               <a:t>① Linux 기본 명령어</a:t>
             </a:r>
           </a:p>
@@ -4528,6 +4700,7 @@
               <a:defRPr sz="2200"/>
             </a:pPr>
             <a:r>
+              <a:rPr sz="2200"/>
               <a:t>② 변수 / 문자열 → ③ if / case → ④ for / while</a:t>
             </a:r>
           </a:p>
@@ -4539,6 +4712,7 @@
               <a:defRPr sz="2200"/>
             </a:pPr>
             <a:r>
+              <a:rPr sz="2200"/>
               <a:t>⑤ 함수 / 명령행 인자 → ⑥ 파일 처리</a:t>
             </a:r>
           </a:p>
@@ -4550,6 +4724,7 @@
               <a:defRPr sz="2200"/>
             </a:pPr>
             <a:r>
+              <a:rPr sz="2200"/>
               <a:t>⑦ grep / awk / sed / find → ⑧ 프로세스·로그 자동화</a:t>
             </a:r>
           </a:p>
@@ -4561,6 +4736,7 @@
               <a:defRPr sz="2200"/>
             </a:pPr>
             <a:r>
+              <a:rPr sz="2200"/>
               <a:t>특히 grep + awk + sed + find + pipe를 집중 학습</a:t>
             </a:r>
           </a:p>
@@ -4575,7 +4751,7 @@
 </file>
 
 <file path=ppt/slides/slide2.xml><?xml version="1.0" encoding="utf-8"?>
-<p:sld xmlns:a="http://schemas.openxmlformats.org/drawingml/2006/main" xmlns:p="http://schemas.openxmlformats.org/presentationml/2006/main" xmlns:r="http://schemas.openxmlformats.org/officeDocument/2006/relationships">
+<p:sld xmlns:a="http://schemas.openxmlformats.org/drawingml/2006/main" xmlns:r="http://schemas.openxmlformats.org/officeDocument/2006/relationships" xmlns:p="http://schemas.openxmlformats.org/presentationml/2006/main">
   <p:cSld>
     <p:spTree>
       <p:nvGrpSpPr>
@@ -4583,7 +4759,14 @@
         <p:cNvGrpSpPr/>
         <p:nvPr/>
       </p:nvGrpSpPr>
-      <p:grpSpPr/>
+      <p:grpSpPr>
+        <a:xfrm>
+          <a:off x="0" y="0"/>
+          <a:ext cx="0" cy="0"/>
+          <a:chOff x="0" y="0"/>
+          <a:chExt cx="0" cy="0"/>
+        </a:xfrm>
+      </p:grpSpPr>
       <p:sp>
         <p:nvSpPr>
           <p:cNvPr id="2" name="Title 1"/>
@@ -4613,8 +4796,8 @@
         </p:nvSpPr>
         <p:spPr>
           <a:xfrm>
-            <a:off x="640080" y="1280160"/>
-            <a:ext cx="10881360" cy="5029200"/>
+            <a:off x="640080" y="1280161"/>
+            <a:ext cx="10881360" cy="1831271"/>
           </a:xfrm>
           <a:prstGeom prst="rect">
             <a:avLst/>
@@ -4634,41 +4817,109 @@
               <a:defRPr sz="2200"/>
             </a:pPr>
             <a:r>
-              <a:t>#!/bin/bash : Bash로 실행하도록 지정</a:t>
-            </a:r>
-          </a:p>
-          <a:p>
-            <a:pPr>
-              <a:spcAft>
-                <a:spcPts val="1000"/>
-              </a:spcAft>
-              <a:defRPr sz="2200"/>
-            </a:pPr>
-            <a:r>
-              <a:t>chmod +x script.sh : 실행 권한 부여</a:t>
-            </a:r>
-          </a:p>
-          <a:p>
-            <a:pPr>
-              <a:spcAft>
-                <a:spcPts val="1000"/>
-              </a:spcAft>
-              <a:defRPr sz="2200"/>
-            </a:pPr>
-            <a:r>
-              <a:t>./script.sh 또는 bash script.sh : 실행</a:t>
-            </a:r>
-          </a:p>
-          <a:p>
-            <a:pPr>
-              <a:spcAft>
-                <a:spcPts val="1000"/>
-              </a:spcAft>
-              <a:defRPr sz="2200"/>
-            </a:pPr>
-            <a:r>
-              <a:t># : 주석</a:t>
-            </a:r>
+              <a:rPr sz="2200" dirty="0"/>
+              <a:t>#!/bin/bash : </a:t>
+            </a:r>
+            <a:r>
+              <a:rPr sz="2200" dirty="0" err="1"/>
+              <a:t>Bash로</a:t>
+            </a:r>
+            <a:r>
+              <a:rPr sz="2200" dirty="0"/>
+              <a:t> </a:t>
+            </a:r>
+            <a:r>
+              <a:rPr sz="2200" dirty="0" err="1"/>
+              <a:t>실행하도록</a:t>
+            </a:r>
+            <a:r>
+              <a:rPr sz="2200" dirty="0"/>
+              <a:t> </a:t>
+            </a:r>
+            <a:r>
+              <a:rPr sz="2200" dirty="0" err="1"/>
+              <a:t>지정</a:t>
+            </a:r>
+            <a:endParaRPr sz="2200" dirty="0"/>
+          </a:p>
+          <a:p>
+            <a:pPr>
+              <a:spcAft>
+                <a:spcPts val="1000"/>
+              </a:spcAft>
+              <a:defRPr sz="2200"/>
+            </a:pPr>
+            <a:r>
+              <a:rPr sz="2200" dirty="0" err="1"/>
+              <a:t>chmod</a:t>
+            </a:r>
+            <a:r>
+              <a:rPr sz="2200" dirty="0"/>
+              <a:t> +x script.sh : </a:t>
+            </a:r>
+            <a:r>
+              <a:rPr sz="2200" dirty="0" err="1"/>
+              <a:t>실행</a:t>
+            </a:r>
+            <a:r>
+              <a:rPr sz="2200" dirty="0"/>
+              <a:t> </a:t>
+            </a:r>
+            <a:r>
+              <a:rPr sz="2200" dirty="0" err="1"/>
+              <a:t>권한</a:t>
+            </a:r>
+            <a:r>
+              <a:rPr sz="2200" dirty="0"/>
+              <a:t> </a:t>
+            </a:r>
+            <a:r>
+              <a:rPr sz="2200" dirty="0" err="1"/>
+              <a:t>부여</a:t>
+            </a:r>
+            <a:endParaRPr sz="2200" dirty="0"/>
+          </a:p>
+          <a:p>
+            <a:pPr>
+              <a:spcAft>
+                <a:spcPts val="1000"/>
+              </a:spcAft>
+              <a:defRPr sz="2200"/>
+            </a:pPr>
+            <a:r>
+              <a:rPr sz="2200" dirty="0"/>
+              <a:t>./script.sh </a:t>
+            </a:r>
+            <a:r>
+              <a:rPr sz="2200" dirty="0" err="1"/>
+              <a:t>또는</a:t>
+            </a:r>
+            <a:r>
+              <a:rPr sz="2200" dirty="0"/>
+              <a:t> bash script.sh : </a:t>
+            </a:r>
+            <a:r>
+              <a:rPr sz="2200" dirty="0" err="1"/>
+              <a:t>실행</a:t>
+            </a:r>
+            <a:endParaRPr sz="2200" dirty="0"/>
+          </a:p>
+          <a:p>
+            <a:pPr>
+              <a:spcAft>
+                <a:spcPts val="1000"/>
+              </a:spcAft>
+              <a:defRPr sz="2200"/>
+            </a:pPr>
+            <a:r>
+              <a:rPr sz="2200" dirty="0"/>
+              <a:t># : </a:t>
+            </a:r>
+            <a:r>
+              <a:rPr sz="2200" dirty="0" err="1"/>
+              <a:t>주석</a:t>
+            </a:r>
+            <a:endParaRPr sz="2200" dirty="0"/>
           </a:p>
         </p:txBody>
       </p:sp>
@@ -4680,8 +4931,8 @@
         </p:nvSpPr>
         <p:spPr>
           <a:xfrm>
-            <a:off x="822960" y="4389120"/>
-            <a:ext cx="10424160" cy="1645920"/>
+            <a:off x="822960" y="4389121"/>
+            <a:ext cx="2043188" cy="615553"/>
           </a:xfrm>
           <a:prstGeom prst="rect">
             <a:avLst/>
@@ -4700,6 +4951,7 @@
               </a:defRPr>
             </a:pPr>
             <a:r>
+              <a:rPr sz="1600"/>
               <a:t>#!/bin/bash</a:t>
             </a:r>
           </a:p>
@@ -4719,7 +4971,7 @@
 </file>
 
 <file path=ppt/slides/slide20.xml><?xml version="1.0" encoding="utf-8"?>
-<p:sld xmlns:a="http://schemas.openxmlformats.org/drawingml/2006/main" xmlns:p="http://schemas.openxmlformats.org/presentationml/2006/main" xmlns:r="http://schemas.openxmlformats.org/officeDocument/2006/relationships">
+<p:sld xmlns:a="http://schemas.openxmlformats.org/drawingml/2006/main" xmlns:r="http://schemas.openxmlformats.org/officeDocument/2006/relationships" xmlns:p="http://schemas.openxmlformats.org/presentationml/2006/main">
   <p:cSld>
     <p:spTree>
       <p:nvGrpSpPr>
@@ -4727,7 +4979,14 @@
         <p:cNvGrpSpPr/>
         <p:nvPr/>
       </p:nvGrpSpPr>
-      <p:grpSpPr/>
+      <p:grpSpPr>
+        <a:xfrm>
+          <a:off x="0" y="0"/>
+          <a:ext cx="0" cy="0"/>
+          <a:chOff x="0" y="0"/>
+          <a:chExt cx="0" cy="0"/>
+        </a:xfrm>
+      </p:grpSpPr>
       <p:sp>
         <p:nvSpPr>
           <p:cNvPr id="2" name="Title 1"/>
@@ -4757,8 +5016,8 @@
         </p:nvSpPr>
         <p:spPr>
           <a:xfrm>
-            <a:off x="640080" y="1280160"/>
-            <a:ext cx="10881360" cy="5029200"/>
+            <a:off x="640080" y="1280161"/>
+            <a:ext cx="10881360" cy="2298065"/>
           </a:xfrm>
           <a:prstGeom prst="rect">
             <a:avLst/>
@@ -4778,6 +5037,7 @@
               <a:defRPr sz="2200"/>
             </a:pPr>
             <a:r>
+              <a:rPr sz="2200"/>
               <a:t>기본: echo, read / 변수: $var, ${var}</a:t>
             </a:r>
           </a:p>
@@ -4789,6 +5049,7 @@
               <a:defRPr sz="2200"/>
             </a:pPr>
             <a:r>
+              <a:rPr sz="2200"/>
               <a:t>조건: if, case / 반복: for, while</a:t>
             </a:r>
           </a:p>
@@ -4800,6 +5061,7 @@
               <a:defRPr sz="2200"/>
             </a:pPr>
             <a:r>
+              <a:rPr sz="2200"/>
               <a:t>함수: function() / 인자: $1, $2, $@</a:t>
             </a:r>
           </a:p>
@@ -4811,6 +5073,7 @@
               <a:defRPr sz="2200"/>
             </a:pPr>
             <a:r>
+              <a:rPr sz="2200"/>
               <a:t>파일: -f, -d, -e / 텍스트: grep, awk, sed</a:t>
             </a:r>
           </a:p>
@@ -4822,6 +5085,7 @@
               <a:defRPr sz="2200"/>
             </a:pPr>
             <a:r>
+              <a:rPr sz="2200"/>
               <a:t>연결: | / 리다이렉션: &gt;, &gt;&gt;, 2&gt;</a:t>
             </a:r>
           </a:p>
@@ -4836,7 +5100,7 @@
 </file>
 
 <file path=ppt/slides/slide3.xml><?xml version="1.0" encoding="utf-8"?>
-<p:sld xmlns:a="http://schemas.openxmlformats.org/drawingml/2006/main" xmlns:p="http://schemas.openxmlformats.org/presentationml/2006/main" xmlns:r="http://schemas.openxmlformats.org/officeDocument/2006/relationships">
+<p:sld xmlns:a="http://schemas.openxmlformats.org/drawingml/2006/main" xmlns:r="http://schemas.openxmlformats.org/officeDocument/2006/relationships" xmlns:p="http://schemas.openxmlformats.org/presentationml/2006/main">
   <p:cSld>
     <p:spTree>
       <p:nvGrpSpPr>
@@ -4844,7 +5108,14 @@
         <p:cNvGrpSpPr/>
         <p:nvPr/>
       </p:nvGrpSpPr>
-      <p:grpSpPr/>
+      <p:grpSpPr>
+        <a:xfrm>
+          <a:off x="0" y="0"/>
+          <a:ext cx="0" cy="0"/>
+          <a:chOff x="0" y="0"/>
+          <a:chExt cx="0" cy="0"/>
+        </a:xfrm>
+      </p:grpSpPr>
       <p:sp>
         <p:nvSpPr>
           <p:cNvPr id="2" name="Title 1"/>
@@ -4874,8 +5145,8 @@
         </p:nvSpPr>
         <p:spPr>
           <a:xfrm>
-            <a:off x="640080" y="1280160"/>
-            <a:ext cx="10881360" cy="5029200"/>
+            <a:off x="640080" y="1280161"/>
+            <a:ext cx="10881360" cy="1831271"/>
           </a:xfrm>
           <a:prstGeom prst="rect">
             <a:avLst/>
@@ -4895,6 +5166,7 @@
               <a:defRPr sz="2200"/>
             </a:pPr>
             <a:r>
+              <a:rPr sz="2200"/>
               <a:t>변수 대입: name="Linux"</a:t>
             </a:r>
           </a:p>
@@ -4906,6 +5178,7 @@
               <a:defRPr sz="2200"/>
             </a:pPr>
             <a:r>
+              <a:rPr sz="2200"/>
               <a:t>변수 참조: $name, ${name}</a:t>
             </a:r>
           </a:p>
@@ -4917,6 +5190,7 @@
               <a:defRPr sz="2200"/>
             </a:pPr>
             <a:r>
+              <a:rPr sz="2200"/>
               <a:t>대입문 = 앞뒤에는 공백을 넣지 않음</a:t>
             </a:r>
           </a:p>
@@ -4928,6 +5202,7 @@
               <a:defRPr sz="2200"/>
             </a:pPr>
             <a:r>
+              <a:rPr sz="2200"/>
               <a:t>변수는 큰따옴표로 감싸는 습관이 중요</a:t>
             </a:r>
           </a:p>
@@ -4941,8 +5216,8 @@
         </p:nvSpPr>
         <p:spPr>
           <a:xfrm>
-            <a:off x="822960" y="4389120"/>
-            <a:ext cx="10424160" cy="1645920"/>
+            <a:off x="822961" y="4389121"/>
+            <a:ext cx="2047355" cy="615553"/>
           </a:xfrm>
           <a:prstGeom prst="rect">
             <a:avLst/>
@@ -4961,6 +5236,7 @@
               </a:defRPr>
             </a:pPr>
             <a:r>
+              <a:rPr sz="1600"/>
               <a:t>name="Linux"</a:t>
             </a:r>
           </a:p>
@@ -4980,7 +5256,7 @@
 </file>
 
 <file path=ppt/slides/slide4.xml><?xml version="1.0" encoding="utf-8"?>
-<p:sld xmlns:a="http://schemas.openxmlformats.org/drawingml/2006/main" xmlns:p="http://schemas.openxmlformats.org/presentationml/2006/main" xmlns:r="http://schemas.openxmlformats.org/officeDocument/2006/relationships">
+<p:sld xmlns:a="http://schemas.openxmlformats.org/drawingml/2006/main" xmlns:r="http://schemas.openxmlformats.org/officeDocument/2006/relationships" xmlns:p="http://schemas.openxmlformats.org/presentationml/2006/main">
   <p:cSld>
     <p:spTree>
       <p:nvGrpSpPr>
@@ -4988,7 +5264,14 @@
         <p:cNvGrpSpPr/>
         <p:nvPr/>
       </p:nvGrpSpPr>
-      <p:grpSpPr/>
+      <p:grpSpPr>
+        <a:xfrm>
+          <a:off x="0" y="0"/>
+          <a:ext cx="0" cy="0"/>
+          <a:chOff x="0" y="0"/>
+          <a:chExt cx="0" cy="0"/>
+        </a:xfrm>
+      </p:grpSpPr>
       <p:sp>
         <p:nvSpPr>
           <p:cNvPr id="2" name="Title 1"/>
@@ -5019,7 +5302,7 @@
         <p:spPr>
           <a:xfrm>
             <a:off x="640080" y="1280160"/>
-            <a:ext cx="10881360" cy="5029200"/>
+            <a:ext cx="10881360" cy="1364476"/>
           </a:xfrm>
           <a:prstGeom prst="rect">
             <a:avLst/>
@@ -5039,6 +5322,7 @@
               <a:defRPr sz="2200"/>
             </a:pPr>
             <a:r>
+              <a:rPr sz="2200"/>
               <a:t>read : 사용자 입력 받기</a:t>
             </a:r>
           </a:p>
@@ -5050,6 +5334,7 @@
               <a:defRPr sz="2200"/>
             </a:pPr>
             <a:r>
+              <a:rPr sz="2200"/>
               <a:t>$(command) : 명령어 실행 결과를 변수에 저장</a:t>
             </a:r>
           </a:p>
@@ -5061,6 +5346,7 @@
               <a:defRPr sz="2200"/>
             </a:pPr>
             <a:r>
+              <a:rPr sz="2200"/>
               <a:t>서버 정보나 날짜를 자동으로 처리할 때 자주 사용</a:t>
             </a:r>
           </a:p>
@@ -5075,7 +5361,7 @@
         <p:spPr>
           <a:xfrm>
             <a:off x="822960" y="4389120"/>
-            <a:ext cx="10424160" cy="1645920"/>
+            <a:ext cx="2899192" cy="892552"/>
           </a:xfrm>
           <a:prstGeom prst="rect">
             <a:avLst/>
@@ -5094,6 +5380,7 @@
               </a:defRPr>
             </a:pPr>
             <a:r>
+              <a:rPr sz="1600"/>
               <a:t>read -p "이름: " name</a:t>
             </a:r>
           </a:p>
@@ -5118,7 +5405,7 @@
 </file>
 
 <file path=ppt/slides/slide5.xml><?xml version="1.0" encoding="utf-8"?>
-<p:sld xmlns:a="http://schemas.openxmlformats.org/drawingml/2006/main" xmlns:p="http://schemas.openxmlformats.org/presentationml/2006/main" xmlns:r="http://schemas.openxmlformats.org/officeDocument/2006/relationships">
+<p:sld xmlns:a="http://schemas.openxmlformats.org/drawingml/2006/main" xmlns:r="http://schemas.openxmlformats.org/officeDocument/2006/relationships" xmlns:p="http://schemas.openxmlformats.org/presentationml/2006/main">
   <p:cSld>
     <p:spTree>
       <p:nvGrpSpPr>
@@ -5126,7 +5413,14 @@
         <p:cNvGrpSpPr/>
         <p:nvPr/>
       </p:nvGrpSpPr>
-      <p:grpSpPr/>
+      <p:grpSpPr>
+        <a:xfrm>
+          <a:off x="0" y="0"/>
+          <a:ext cx="0" cy="0"/>
+          <a:chOff x="0" y="0"/>
+          <a:chExt cx="0" cy="0"/>
+        </a:xfrm>
+      </p:grpSpPr>
       <p:sp>
         <p:nvSpPr>
           <p:cNvPr id="2" name="Title 1"/>
@@ -5157,7 +5451,7 @@
         <p:spPr>
           <a:xfrm>
             <a:off x="640080" y="1280160"/>
-            <a:ext cx="10881360" cy="5029200"/>
+            <a:ext cx="10881360" cy="1364476"/>
           </a:xfrm>
           <a:prstGeom prst="rect">
             <a:avLst/>
@@ -5177,6 +5471,7 @@
               <a:defRPr sz="2200"/>
             </a:pPr>
             <a:r>
+              <a:rPr sz="2200"/>
               <a:t>$(( )) : 정수 계산</a:t>
             </a:r>
           </a:p>
@@ -5188,6 +5483,7 @@
               <a:defRPr sz="2200"/>
             </a:pPr>
             <a:r>
+              <a:rPr sz="2200"/>
               <a:t>+, -, *, /, % 등의 연산 지원</a:t>
             </a:r>
           </a:p>
@@ -5199,6 +5495,7 @@
               <a:defRPr sz="2200"/>
             </a:pPr>
             <a:r>
+              <a:rPr sz="2200"/>
               <a:t>쉘의 기본 산술은 정수 중심</a:t>
             </a:r>
           </a:p>
@@ -5212,8 +5509,8 @@
         </p:nvSpPr>
         <p:spPr>
           <a:xfrm>
-            <a:off x="822960" y="4389120"/>
-            <a:ext cx="10424160" cy="1645920"/>
+            <a:off x="822960" y="4389121"/>
+            <a:ext cx="1547218" cy="1169551"/>
           </a:xfrm>
           <a:prstGeom prst="rect">
             <a:avLst/>
@@ -5232,6 +5529,7 @@
               </a:defRPr>
             </a:pPr>
             <a:r>
+              <a:rPr sz="1600"/>
               <a:t>a=10</a:t>
             </a:r>
           </a:p>
@@ -5261,7 +5559,7 @@
 </file>
 
 <file path=ppt/slides/slide6.xml><?xml version="1.0" encoding="utf-8"?>
-<p:sld xmlns:a="http://schemas.openxmlformats.org/drawingml/2006/main" xmlns:p="http://schemas.openxmlformats.org/presentationml/2006/main" xmlns:r="http://schemas.openxmlformats.org/officeDocument/2006/relationships">
+<p:sld xmlns:a="http://schemas.openxmlformats.org/drawingml/2006/main" xmlns:r="http://schemas.openxmlformats.org/officeDocument/2006/relationships" xmlns:p="http://schemas.openxmlformats.org/presentationml/2006/main">
   <p:cSld>
     <p:spTree>
       <p:nvGrpSpPr>
@@ -5269,7 +5567,14 @@
         <p:cNvGrpSpPr/>
         <p:nvPr/>
       </p:nvGrpSpPr>
-      <p:grpSpPr/>
+      <p:grpSpPr>
+        <a:xfrm>
+          <a:off x="0" y="0"/>
+          <a:ext cx="0" cy="0"/>
+          <a:chOff x="0" y="0"/>
+          <a:chExt cx="0" cy="0"/>
+        </a:xfrm>
+      </p:grpSpPr>
       <p:sp>
         <p:nvSpPr>
           <p:cNvPr id="2" name="Title 1"/>
@@ -5299,8 +5604,8 @@
         </p:nvSpPr>
         <p:spPr>
           <a:xfrm>
-            <a:off x="640080" y="1280160"/>
-            <a:ext cx="10881360" cy="5029200"/>
+            <a:off x="640080" y="1280161"/>
+            <a:ext cx="10881360" cy="1831271"/>
           </a:xfrm>
           <a:prstGeom prst="rect">
             <a:avLst/>
@@ -5320,6 +5625,7 @@
               <a:defRPr sz="2200"/>
             </a:pPr>
             <a:r>
+              <a:rPr sz="2200"/>
               <a:t>if / elif / else / fi 구조</a:t>
             </a:r>
           </a:p>
@@ -5331,6 +5637,7 @@
               <a:defRPr sz="2200"/>
             </a:pPr>
             <a:r>
+              <a:rPr sz="2200"/>
               <a:t>숫자 비교: -eq, -ne, -gt, -ge, -lt, -le</a:t>
             </a:r>
           </a:p>
@@ -5342,6 +5649,7 @@
               <a:defRPr sz="2200"/>
             </a:pPr>
             <a:r>
+              <a:rPr sz="2200"/>
               <a:t>문자열 비교: =, !=</a:t>
             </a:r>
           </a:p>
@@ -5353,6 +5661,7 @@
               <a:defRPr sz="2200"/>
             </a:pPr>
             <a:r>
+              <a:rPr sz="2200"/>
               <a:t>Bash에서는 [[ ]] 사용도 편리</a:t>
             </a:r>
           </a:p>
@@ -5367,7 +5676,7 @@
         <p:spPr>
           <a:xfrm>
             <a:off x="822960" y="4389120"/>
-            <a:ext cx="10424160" cy="1645920"/>
+            <a:ext cx="3326552" cy="1446550"/>
           </a:xfrm>
           <a:prstGeom prst="rect">
             <a:avLst/>
@@ -5386,6 +5695,7 @@
               </a:defRPr>
             </a:pPr>
             <a:r>
+              <a:rPr sz="1600"/>
               <a:t>if [[ "$age" -ge 18 ]]; then</a:t>
             </a:r>
           </a:p>
@@ -5420,7 +5730,7 @@
 </file>
 
 <file path=ppt/slides/slide7.xml><?xml version="1.0" encoding="utf-8"?>
-<p:sld xmlns:a="http://schemas.openxmlformats.org/drawingml/2006/main" xmlns:p="http://schemas.openxmlformats.org/presentationml/2006/main" xmlns:r="http://schemas.openxmlformats.org/officeDocument/2006/relationships">
+<p:sld xmlns:a="http://schemas.openxmlformats.org/drawingml/2006/main" xmlns:r="http://schemas.openxmlformats.org/officeDocument/2006/relationships" xmlns:p="http://schemas.openxmlformats.org/presentationml/2006/main">
   <p:cSld>
     <p:spTree>
       <p:nvGrpSpPr>
@@ -5428,7 +5738,14 @@
         <p:cNvGrpSpPr/>
         <p:nvPr/>
       </p:nvGrpSpPr>
-      <p:grpSpPr/>
+      <p:grpSpPr>
+        <a:xfrm>
+          <a:off x="0" y="0"/>
+          <a:ext cx="0" cy="0"/>
+          <a:chOff x="0" y="0"/>
+          <a:chExt cx="0" cy="0"/>
+        </a:xfrm>
+      </p:grpSpPr>
       <p:sp>
         <p:nvSpPr>
           <p:cNvPr id="2" name="Title 1"/>
@@ -5458,8 +5775,8 @@
         </p:nvSpPr>
         <p:spPr>
           <a:xfrm>
-            <a:off x="640080" y="1280160"/>
-            <a:ext cx="10881360" cy="5029200"/>
+            <a:off x="640080" y="1280161"/>
+            <a:ext cx="10881360" cy="1831271"/>
           </a:xfrm>
           <a:prstGeom prst="rect">
             <a:avLst/>
@@ -5479,6 +5796,7 @@
               <a:defRPr sz="2200"/>
             </a:pPr>
             <a:r>
+              <a:rPr sz="2200"/>
               <a:t>-f : 일반 파일인지 확인</a:t>
             </a:r>
           </a:p>
@@ -5490,6 +5808,7 @@
               <a:defRPr sz="2200"/>
             </a:pPr>
             <a:r>
+              <a:rPr sz="2200"/>
               <a:t>-d : 디렉터리인지 확인</a:t>
             </a:r>
           </a:p>
@@ -5501,6 +5820,7 @@
               <a:defRPr sz="2200"/>
             </a:pPr>
             <a:r>
+              <a:rPr sz="2200"/>
               <a:t>-e : 존재 여부 확인</a:t>
             </a:r>
           </a:p>
@@ -5512,6 +5832,7 @@
               <a:defRPr sz="2200"/>
             </a:pPr>
             <a:r>
+              <a:rPr sz="2200"/>
               <a:t>-r / -w / -x : 읽기 / 쓰기 / 실행 권한 확인</a:t>
             </a:r>
           </a:p>
@@ -5525,8 +5846,8 @@
         </p:nvSpPr>
         <p:spPr>
           <a:xfrm>
-            <a:off x="822960" y="4389120"/>
-            <a:ext cx="10424160" cy="1645920"/>
+            <a:off x="822962" y="4389120"/>
+            <a:ext cx="2765501" cy="892552"/>
           </a:xfrm>
           <a:prstGeom prst="rect">
             <a:avLst/>
@@ -5545,6 +5866,7 @@
               </a:defRPr>
             </a:pPr>
             <a:r>
+              <a:rPr sz="1600"/>
               <a:t>if [ -f "$file" ]; then</a:t>
             </a:r>
           </a:p>
@@ -5569,7 +5891,7 @@
 </file>
 
 <file path=ppt/slides/slide8.xml><?xml version="1.0" encoding="utf-8"?>
-<p:sld xmlns:a="http://schemas.openxmlformats.org/drawingml/2006/main" xmlns:p="http://schemas.openxmlformats.org/presentationml/2006/main" xmlns:r="http://schemas.openxmlformats.org/officeDocument/2006/relationships">
+<p:sld xmlns:a="http://schemas.openxmlformats.org/drawingml/2006/main" xmlns:r="http://schemas.openxmlformats.org/officeDocument/2006/relationships" xmlns:p="http://schemas.openxmlformats.org/presentationml/2006/main">
   <p:cSld>
     <p:spTree>
       <p:nvGrpSpPr>
@@ -5577,7 +5899,14 @@
         <p:cNvGrpSpPr/>
         <p:nvPr/>
       </p:nvGrpSpPr>
-      <p:grpSpPr/>
+      <p:grpSpPr>
+        <a:xfrm>
+          <a:off x="0" y="0"/>
+          <a:ext cx="0" cy="0"/>
+          <a:chOff x="0" y="0"/>
+          <a:chExt cx="0" cy="0"/>
+        </a:xfrm>
+      </p:grpSpPr>
       <p:sp>
         <p:nvSpPr>
           <p:cNvPr id="2" name="Title 1"/>
@@ -5608,7 +5937,7 @@
         <p:spPr>
           <a:xfrm>
             <a:off x="640080" y="1280160"/>
-            <a:ext cx="10881360" cy="5029200"/>
+            <a:ext cx="10881360" cy="1364476"/>
           </a:xfrm>
           <a:prstGeom prst="rect">
             <a:avLst/>
@@ -5628,6 +5957,7 @@
               <a:defRPr sz="2200"/>
             </a:pPr>
             <a:r>
+              <a:rPr sz="2200"/>
               <a:t>여러 선택지를 분기할 때 사용</a:t>
             </a:r>
           </a:p>
@@ -5639,6 +5969,7 @@
               <a:defRPr sz="2200"/>
             </a:pPr>
             <a:r>
+              <a:rPr sz="2200"/>
               <a:t>start / stop / restart 같은 명령 처리에 적합</a:t>
             </a:r>
           </a:p>
@@ -5650,6 +5981,7 @@
               <a:defRPr sz="2200"/>
             </a:pPr>
             <a:r>
+              <a:rPr sz="2200"/>
               <a:t>* : 나머지 모든 경우</a:t>
             </a:r>
           </a:p>
@@ -5663,8 +5995,8 @@
         </p:nvSpPr>
         <p:spPr>
           <a:xfrm>
-            <a:off x="822960" y="4389120"/>
-            <a:ext cx="10424160" cy="1645920"/>
+            <a:off x="822961" y="4389120"/>
+            <a:ext cx="2178225" cy="1446550"/>
           </a:xfrm>
           <a:prstGeom prst="rect">
             <a:avLst/>
@@ -5683,6 +6015,7 @@
               </a:defRPr>
             </a:pPr>
             <a:r>
+              <a:rPr sz="1600"/>
               <a:t>case "$1" in</a:t>
             </a:r>
           </a:p>
@@ -5717,7 +6050,7 @@
 </file>
 
 <file path=ppt/slides/slide9.xml><?xml version="1.0" encoding="utf-8"?>
-<p:sld xmlns:a="http://schemas.openxmlformats.org/drawingml/2006/main" xmlns:p="http://schemas.openxmlformats.org/presentationml/2006/main" xmlns:r="http://schemas.openxmlformats.org/officeDocument/2006/relationships">
+<p:sld xmlns:a="http://schemas.openxmlformats.org/drawingml/2006/main" xmlns:r="http://schemas.openxmlformats.org/officeDocument/2006/relationships" xmlns:p="http://schemas.openxmlformats.org/presentationml/2006/main">
   <p:cSld>
     <p:spTree>
       <p:nvGrpSpPr>
@@ -5725,7 +6058,14 @@
         <p:cNvGrpSpPr/>
         <p:nvPr/>
       </p:nvGrpSpPr>
-      <p:grpSpPr/>
+      <p:grpSpPr>
+        <a:xfrm>
+          <a:off x="0" y="0"/>
+          <a:ext cx="0" cy="0"/>
+          <a:chOff x="0" y="0"/>
+          <a:chExt cx="0" cy="0"/>
+        </a:xfrm>
+      </p:grpSpPr>
       <p:sp>
         <p:nvSpPr>
           <p:cNvPr id="2" name="Title 1"/>
@@ -5756,7 +6096,7 @@
         <p:spPr>
           <a:xfrm>
             <a:off x="640080" y="1280160"/>
-            <a:ext cx="10881360" cy="5029200"/>
+            <a:ext cx="10881360" cy="1364476"/>
           </a:xfrm>
           <a:prstGeom prst="rect">
             <a:avLst/>
@@ -5776,6 +6116,7 @@
               <a:defRPr sz="2200"/>
             </a:pPr>
             <a:r>
+              <a:rPr sz="2200"/>
               <a:t>for : 목록이나 파일을 반복 처리</a:t>
             </a:r>
           </a:p>
@@ -5787,6 +6128,7 @@
               <a:defRPr sz="2200"/>
             </a:pPr>
             <a:r>
+              <a:rPr sz="2200"/>
               <a:t>while : 조건이 참인 동안 반복</a:t>
             </a:r>
           </a:p>
@@ -5798,6 +6140,7 @@
               <a:defRPr sz="2200"/>
             </a:pPr>
             <a:r>
+              <a:rPr sz="2200"/>
               <a:t>파일 자동 처리와 서버 관리에 매우 자주 사용</a:t>
             </a:r>
           </a:p>
@@ -5812,7 +6155,7 @@
         <p:spPr>
           <a:xfrm>
             <a:off x="822960" y="4389120"/>
-            <a:ext cx="10424160" cy="1645920"/>
+            <a:ext cx="2541080" cy="892552"/>
           </a:xfrm>
           <a:prstGeom prst="rect">
             <a:avLst/>
@@ -5831,6 +6174,7 @@
               </a:defRPr>
             </a:pPr>
             <a:r>
+              <a:rPr sz="1600"/>
               <a:t>for file in *.log; do</a:t>
             </a:r>
           </a:p>
